--- a/pptx/presentation_sauvegarde.pptx
+++ b/pptx/presentation_sauvegarde.pptx
@@ -5,13 +5,9 @@
     <p:sldMasterId id="2147483648" r:id="rId1"/>
   </p:sldMasterIdLst>
   <p:sldIdLst>
-    <p:sldId id="257" r:id="rId2"/>
-    <p:sldId id="256" r:id="rId3"/>
-    <p:sldId id="258" r:id="rId4"/>
-    <p:sldId id="259" r:id="rId5"/>
-    <p:sldId id="260" r:id="rId6"/>
-    <p:sldId id="262" r:id="rId7"/>
-    <p:sldId id="261" r:id="rId8"/>
+    <p:sldId id="259" r:id="rId2"/>
+    <p:sldId id="260" r:id="rId3"/>
+    <p:sldId id="262" r:id="rId4"/>
   </p:sldIdLst>
   <p:sldSz cx="12192000" cy="6858000"/>
   <p:notesSz cx="6858000" cy="9144000"/>
@@ -3320,7 +3316,13 @@
   <p:cSld>
     <p:spTree>
       <p:nvGrpSpPr>
-        <p:cNvPr id="1" name=""/>
+        <p:cNvPr id="1" name="">
+          <a:extLst>
+            <a:ext uri="{FF2B5EF4-FFF2-40B4-BE49-F238E27FC236}">
+              <a16:creationId xmlns:a16="http://schemas.microsoft.com/office/drawing/2014/main" id="{F7BFA7D6-6AF8-BA04-8D8D-8A03CFB0DD41}"/>
+            </a:ext>
+          </a:extLst>
+        </p:cNvPr>
         <p:cNvGrpSpPr/>
         <p:nvPr/>
       </p:nvGrpSpPr>
@@ -3334,408 +3336,10 @@
       </p:grpSpPr>
       <p:sp>
         <p:nvSpPr>
-          <p:cNvPr id="4" name="Rectangle : coins arrondis 3">
-            <a:extLst>
-              <a:ext uri="{FF2B5EF4-FFF2-40B4-BE49-F238E27FC236}">
-                <a16:creationId xmlns:a16="http://schemas.microsoft.com/office/drawing/2014/main" id="{15888697-008B-7CF5-7C44-A0CFB875FF8F}"/>
-              </a:ext>
-            </a:extLst>
-          </p:cNvPr>
-          <p:cNvSpPr/>
-          <p:nvPr/>
-        </p:nvSpPr>
-        <p:spPr>
-          <a:xfrm>
-            <a:off x="930728" y="587828"/>
-            <a:ext cx="10330543" cy="1469572"/>
-          </a:xfrm>
-          <a:prstGeom prst="roundRect">
-            <a:avLst/>
-          </a:prstGeom>
-        </p:spPr>
-        <p:style>
-          <a:lnRef idx="2">
-            <a:schemeClr val="accent1">
-              <a:shade val="15000"/>
-            </a:schemeClr>
-          </a:lnRef>
-          <a:fillRef idx="1">
-            <a:schemeClr val="accent1"/>
-          </a:fillRef>
-          <a:effectRef idx="0">
-            <a:schemeClr val="accent1"/>
-          </a:effectRef>
-          <a:fontRef idx="minor">
-            <a:schemeClr val="lt1"/>
-          </a:fontRef>
-        </p:style>
-        <p:txBody>
-          <a:bodyPr rtlCol="0" anchor="ctr"/>
-          <a:lstStyle/>
-          <a:p>
-            <a:pPr algn="ctr"/>
-            <a:r>
-              <a:rPr lang="fr-FR" sz="3600" b="1" dirty="0"/>
-              <a:t>MESURES DE RISQUE SPATIALE ET PROCESSUS MAX STABLE</a:t>
-            </a:r>
-          </a:p>
-        </p:txBody>
-      </p:sp>
-      <p:sp>
-        <p:nvSpPr>
-          <p:cNvPr id="7" name="ZoneTexte 6">
-            <a:extLst>
-              <a:ext uri="{FF2B5EF4-FFF2-40B4-BE49-F238E27FC236}">
-                <a16:creationId xmlns:a16="http://schemas.microsoft.com/office/drawing/2014/main" id="{9BE003A2-E7A4-7BD7-339F-96DD57B2B38E}"/>
-              </a:ext>
-            </a:extLst>
-          </p:cNvPr>
-          <p:cNvSpPr txBox="1"/>
-          <p:nvPr/>
-        </p:nvSpPr>
-        <p:spPr>
-          <a:xfrm>
-            <a:off x="3819932" y="3429000"/>
-            <a:ext cx="3941785" cy="461665"/>
-          </a:xfrm>
-          <a:prstGeom prst="rect">
-            <a:avLst/>
-          </a:prstGeom>
-          <a:noFill/>
-        </p:spPr>
-        <p:txBody>
-          <a:bodyPr wrap="none" rtlCol="0">
-            <a:spAutoFit/>
-          </a:bodyPr>
-          <a:lstStyle/>
-          <a:p>
-            <a:r>
-              <a:rPr lang="fr-FR" sz="2400" dirty="0"/>
-              <a:t>ISUP – MASTER 2 ACTUARIAT</a:t>
-            </a:r>
-          </a:p>
-        </p:txBody>
-      </p:sp>
-      <p:sp>
-        <p:nvSpPr>
-          <p:cNvPr id="8" name="ZoneTexte 7">
-            <a:extLst>
-              <a:ext uri="{FF2B5EF4-FFF2-40B4-BE49-F238E27FC236}">
-                <a16:creationId xmlns:a16="http://schemas.microsoft.com/office/drawing/2014/main" id="{24369230-3A33-CF4C-2A9D-2F83C5917D40}"/>
-              </a:ext>
-            </a:extLst>
-          </p:cNvPr>
-          <p:cNvSpPr txBox="1"/>
-          <p:nvPr/>
-        </p:nvSpPr>
-        <p:spPr>
-          <a:xfrm>
-            <a:off x="2992618" y="2377161"/>
-            <a:ext cx="7252819" cy="954107"/>
-          </a:xfrm>
-          <a:prstGeom prst="rect">
-            <a:avLst/>
-          </a:prstGeom>
-          <a:noFill/>
-        </p:spPr>
-        <p:txBody>
-          <a:bodyPr wrap="none" rtlCol="0">
-            <a:spAutoFit/>
-          </a:bodyPr>
-          <a:lstStyle/>
-          <a:p>
-            <a:r>
-              <a:rPr lang="fr-FR" sz="2800" b="1" dirty="0"/>
-              <a:t>BEYE CHEIKH   –     KEBE MAMADOU LAMINE</a:t>
-            </a:r>
-          </a:p>
-          <a:p>
-            <a:r>
-              <a:rPr lang="fr-FR" sz="2800" b="1" dirty="0"/>
-              <a:t>KEBE MBAYE     –      SENE ABDOULAYE </a:t>
-            </a:r>
-          </a:p>
-        </p:txBody>
-      </p:sp>
-      <p:pic>
-        <p:nvPicPr>
-          <p:cNvPr id="10" name="Image 9" descr="L'ESILV signe un accord de double diplôme Ingénieur Statisticien ...">
-            <a:extLst>
-              <a:ext uri="{FF2B5EF4-FFF2-40B4-BE49-F238E27FC236}">
-                <a16:creationId xmlns:a16="http://schemas.microsoft.com/office/drawing/2014/main" id="{736C0712-8F47-712F-83DB-92FA041F256B}"/>
-              </a:ext>
-            </a:extLst>
-          </p:cNvPr>
-          <p:cNvPicPr>
-            <a:picLocks noChangeAspect="1"/>
-          </p:cNvPicPr>
-          <p:nvPr/>
-        </p:nvPicPr>
-        <p:blipFill>
-          <a:blip r:embed="rId2"/>
-          <a:stretch>
-            <a:fillRect/>
-          </a:stretch>
-        </p:blipFill>
-        <p:spPr>
-          <a:xfrm>
-            <a:off x="3281757" y="4811134"/>
-            <a:ext cx="2302616" cy="1337687"/>
-          </a:xfrm>
-          <a:prstGeom prst="rect">
-            <a:avLst/>
-          </a:prstGeom>
-        </p:spPr>
-      </p:pic>
-      <p:pic>
-        <p:nvPicPr>
-          <p:cNvPr id="11" name="Image 10" descr="Avis et témoignages sur Sorbonne Université - Capitaine Study">
-            <a:extLst>
-              <a:ext uri="{FF2B5EF4-FFF2-40B4-BE49-F238E27FC236}">
-                <a16:creationId xmlns:a16="http://schemas.microsoft.com/office/drawing/2014/main" id="{BE687DC5-ECA9-6CE1-3DA6-5B48E3F24D84}"/>
-              </a:ext>
-            </a:extLst>
-          </p:cNvPr>
-          <p:cNvPicPr>
-            <a:picLocks noChangeAspect="1"/>
-          </p:cNvPicPr>
-          <p:nvPr/>
-        </p:nvPicPr>
-        <p:blipFill>
-          <a:blip r:embed="rId3"/>
-          <a:stretch>
-            <a:fillRect/>
-          </a:stretch>
-        </p:blipFill>
-        <p:spPr>
-          <a:xfrm>
-            <a:off x="6095999" y="4811134"/>
-            <a:ext cx="2387697" cy="1555400"/>
-          </a:xfrm>
-          <a:prstGeom prst="rect">
-            <a:avLst/>
-          </a:prstGeom>
-        </p:spPr>
-      </p:pic>
-      <p:sp>
-        <p:nvSpPr>
-          <p:cNvPr id="12" name="ZoneTexte 11">
-            <a:extLst>
-              <a:ext uri="{FF2B5EF4-FFF2-40B4-BE49-F238E27FC236}">
-                <a16:creationId xmlns:a16="http://schemas.microsoft.com/office/drawing/2014/main" id="{A2BF56E1-2BF0-DBE9-FC81-01C8E74F444D}"/>
-              </a:ext>
-            </a:extLst>
-          </p:cNvPr>
-          <p:cNvSpPr txBox="1"/>
-          <p:nvPr/>
-        </p:nvSpPr>
-        <p:spPr>
-          <a:xfrm>
-            <a:off x="4667038" y="4067071"/>
-            <a:ext cx="2333396" cy="461665"/>
-          </a:xfrm>
-          <a:prstGeom prst="rect">
-            <a:avLst/>
-          </a:prstGeom>
-          <a:noFill/>
-        </p:spPr>
-        <p:txBody>
-          <a:bodyPr wrap="none" rtlCol="0">
-            <a:spAutoFit/>
-          </a:bodyPr>
-          <a:lstStyle/>
-          <a:p>
-            <a:r>
-              <a:rPr lang="fr-FR" sz="2400" dirty="0"/>
-              <a:t>28 octobre 2026</a:t>
-            </a:r>
-          </a:p>
-        </p:txBody>
-      </p:sp>
-    </p:spTree>
-    <p:extLst>
-      <p:ext uri="{BB962C8B-B14F-4D97-AF65-F5344CB8AC3E}">
-        <p14:creationId xmlns:p14="http://schemas.microsoft.com/office/powerpoint/2010/main" val="1112297016"/>
-      </p:ext>
-    </p:extLst>
-  </p:cSld>
-  <p:clrMapOvr>
-    <a:masterClrMapping/>
-  </p:clrMapOvr>
-</p:sld>
-</file>
-
-<file path=ppt/slides/slide2.xml><?xml version="1.0" encoding="utf-8"?>
-<p:sld xmlns:a="http://schemas.openxmlformats.org/drawingml/2006/main" xmlns:r="http://schemas.openxmlformats.org/officeDocument/2006/relationships" xmlns:p="http://schemas.openxmlformats.org/presentationml/2006/main">
-  <p:cSld>
-    <p:spTree>
-      <p:nvGrpSpPr>
-        <p:cNvPr id="1" name=""/>
-        <p:cNvGrpSpPr/>
-        <p:nvPr/>
-      </p:nvGrpSpPr>
-      <p:grpSpPr>
-        <a:xfrm>
-          <a:off x="0" y="0"/>
-          <a:ext cx="0" cy="0"/>
-          <a:chOff x="0" y="0"/>
-          <a:chExt cx="0" cy="0"/>
-        </a:xfrm>
-      </p:grpSpPr>
-      <mc:AlternateContent xmlns:mc="http://schemas.openxmlformats.org/markup-compatibility/2006" xmlns:a14="http://schemas.microsoft.com/office/drawing/2010/main">
-        <mc:Choice Requires="a14">
-          <p:sp>
-            <p:nvSpPr>
-              <p:cNvPr id="2" name="ZoneTexte 1">
-                <a:extLst>
-                  <a:ext uri="{FF2B5EF4-FFF2-40B4-BE49-F238E27FC236}">
-                    <a16:creationId xmlns:a16="http://schemas.microsoft.com/office/drawing/2014/main" id="{5491276A-B02F-89C0-B945-17BAFABCF282}"/>
-                  </a:ext>
-                </a:extLst>
-              </p:cNvPr>
-              <p:cNvSpPr txBox="1"/>
-              <p:nvPr/>
-            </p:nvSpPr>
-            <p:spPr>
-              <a:xfrm>
-                <a:off x="6487886" y="6009434"/>
-                <a:ext cx="819007" cy="848566"/>
-              </a:xfrm>
-              <a:prstGeom prst="rect">
-                <a:avLst/>
-              </a:prstGeom>
-              <a:noFill/>
-            </p:spPr>
-            <p:txBody>
-              <a:bodyPr wrap="none" rtlCol="0">
-                <a:spAutoFit/>
-              </a:bodyPr>
-              <a:lstStyle/>
-              <a:p>
-                <a:pPr/>
-                <a14:m>
-                  <m:oMathPara xmlns:m="http://schemas.openxmlformats.org/officeDocument/2006/math">
-                    <m:oMath>
-                      <m:nary>
-                        <m:naryPr>
-                          <m:chr m:val="∑"/>
-                          <m:limLoc m:val="undOvr"/>
-                          <m:grow m:val="on"/>
-                          <m:ctrlPr>
-                            <a:rPr lang="fr-FR" i="1" dirty="0">
-                              <a:latin typeface="Cambria Math" panose="02040503050406030204" pitchFamily="18" charset="0"/>
-                            </a:rPr>
-                          </m:ctrlPr>
-                        </m:naryPr>
-                        <m:sub>
-                          <m:r>
-                            <a:rPr lang="fr-FR" i="1" dirty="0">
-                              <a:latin typeface="Cambria Math" panose="02040503050406030204" pitchFamily="18" charset="0"/>
-                            </a:rPr>
-                            <m:t>𝑖</m:t>
-                          </m:r>
-                          <m:r>
-                            <a:rPr lang="fr-FR" dirty="0">
-                              <a:latin typeface="Cambria Math" panose="02040503050406030204" pitchFamily="18" charset="0"/>
-                            </a:rPr>
-                            <m:t>=1</m:t>
-                          </m:r>
-                        </m:sub>
-                        <m:sup>
-                          <m:r>
-                            <a:rPr lang="fr-FR" i="1" dirty="0">
-                              <a:latin typeface="Cambria Math" panose="02040503050406030204" pitchFamily="18" charset="0"/>
-                            </a:rPr>
-                            <m:t>𝑛</m:t>
-                          </m:r>
-                        </m:sup>
-                        <m:e>
-                          <m:sSup>
-                            <m:sSupPr>
-                              <m:ctrlPr>
-                                <a:rPr lang="fr-FR" i="1" dirty="0">
-                                  <a:latin typeface="Cambria Math" panose="02040503050406030204" pitchFamily="18" charset="0"/>
-                                </a:rPr>
-                              </m:ctrlPr>
-                            </m:sSupPr>
-                            <m:e>
-                              <m:r>
-                                <a:rPr lang="fr-FR" i="1" dirty="0">
-                                  <a:latin typeface="Cambria Math" panose="02040503050406030204" pitchFamily="18" charset="0"/>
-                                </a:rPr>
-                                <m:t>𝑥</m:t>
-                              </m:r>
-                            </m:e>
-                            <m:sup>
-                              <m:r>
-                                <a:rPr lang="fr-FR" dirty="0">
-                                  <a:latin typeface="Cambria Math" panose="02040503050406030204" pitchFamily="18" charset="0"/>
-                                </a:rPr>
-                                <m:t>2</m:t>
-                              </m:r>
-                            </m:sup>
-                          </m:sSup>
-                        </m:e>
-                      </m:nary>
-                    </m:oMath>
-                  </m:oMathPara>
-                </a14:m>
-                <a:endParaRPr lang="fr-FR" dirty="0"/>
-              </a:p>
-            </p:txBody>
-          </p:sp>
-        </mc:Choice>
-        <mc:Fallback xmlns="">
-          <p:sp>
-            <p:nvSpPr>
-              <p:cNvPr id="2" name="ZoneTexte 1">
-                <a:extLst>
-                  <a:ext uri="{FF2B5EF4-FFF2-40B4-BE49-F238E27FC236}">
-                    <a16:creationId xmlns:a16="http://schemas.microsoft.com/office/drawing/2014/main" id="{5491276A-B02F-89C0-B945-17BAFABCF282}"/>
-                  </a:ext>
-                </a:extLst>
-              </p:cNvPr>
-              <p:cNvSpPr txBox="1">
-                <a:spLocks noRot="1" noChangeAspect="1" noMove="1" noResize="1" noEditPoints="1" noAdjustHandles="1" noChangeArrowheads="1" noChangeShapeType="1" noTextEdit="1"/>
-              </p:cNvSpPr>
-              <p:nvPr/>
-            </p:nvSpPr>
-            <p:spPr>
-              <a:xfrm>
-                <a:off x="6487886" y="6009434"/>
-                <a:ext cx="819007" cy="848566"/>
-              </a:xfrm>
-              <a:prstGeom prst="rect">
-                <a:avLst/>
-              </a:prstGeom>
-              <a:blipFill>
-                <a:blip r:embed="rId2"/>
-                <a:stretch>
-                  <a:fillRect/>
-                </a:stretch>
-              </a:blipFill>
-            </p:spPr>
-            <p:txBody>
-              <a:bodyPr/>
-              <a:lstStyle/>
-              <a:p>
-                <a:r>
-                  <a:rPr lang="fr-FR">
-                    <a:noFill/>
-                  </a:rPr>
-                  <a:t> </a:t>
-                </a:r>
-              </a:p>
-            </p:txBody>
-          </p:sp>
-        </mc:Fallback>
-      </mc:AlternateContent>
-      <p:sp>
-        <p:nvSpPr>
           <p:cNvPr id="3" name="Rectangle 2">
             <a:extLst>
               <a:ext uri="{FF2B5EF4-FFF2-40B4-BE49-F238E27FC236}">
-                <a16:creationId xmlns:a16="http://schemas.microsoft.com/office/drawing/2014/main" id="{6C28E021-D238-606F-8283-384AF4A937D6}"/>
+                <a16:creationId xmlns:a16="http://schemas.microsoft.com/office/drawing/2014/main" id="{60A07869-8A3B-E19E-E10E-9A9C619038C3}"/>
               </a:ext>
             </a:extLst>
           </p:cNvPr>
@@ -3773,8 +3377,21 @@
           <a:p>
             <a:r>
               <a:rPr lang="fr-FR" sz="2800" dirty="0"/>
-              <a:t>CONTEXTE ET MOTIVATION</a:t>
-            </a:r>
+              <a:t>Coefficient Extrémal: mesurer la </a:t>
+            </a:r>
+            <a:r>
+              <a:rPr lang="fr-FR" sz="2800" dirty="0" err="1"/>
+              <a:t>dépensdanace</a:t>
+            </a:r>
+            <a:r>
+              <a:rPr lang="fr-FR" sz="2800" dirty="0"/>
+              <a:t> des </a:t>
+            </a:r>
+            <a:r>
+              <a:rPr lang="fr-FR" sz="2800" dirty="0" err="1"/>
+              <a:t>extremes</a:t>
+            </a:r>
+            <a:endParaRPr lang="fr-FR" sz="2800" dirty="0"/>
           </a:p>
         </p:txBody>
       </p:sp>
@@ -3783,7 +3400,7 @@
           <p:cNvPr id="7" name="Rectangle 6">
             <a:extLst>
               <a:ext uri="{FF2B5EF4-FFF2-40B4-BE49-F238E27FC236}">
-                <a16:creationId xmlns:a16="http://schemas.microsoft.com/office/drawing/2014/main" id="{321F642A-5FE3-94C8-02D6-CA935ED03C18}"/>
+                <a16:creationId xmlns:a16="http://schemas.microsoft.com/office/drawing/2014/main" id="{7B0DABE4-926D-3C75-9EDA-C41FEFD6F519}"/>
               </a:ext>
             </a:extLst>
           </p:cNvPr>
@@ -3792,8 +3409,8 @@
         </p:nvSpPr>
         <p:spPr>
           <a:xfrm>
-            <a:off x="620485" y="1665514"/>
-            <a:ext cx="10308771" cy="1067319"/>
+            <a:off x="620485" y="1584132"/>
+            <a:ext cx="10308771" cy="3205579"/>
           </a:xfrm>
           <a:prstGeom prst="rect">
             <a:avLst/>
@@ -3822,24 +3439,257 @@
           <a:bodyPr rtlCol="0" anchor="ctr"/>
           <a:lstStyle/>
           <a:p>
-            <a:r>
-              <a:rPr lang="fr-FR" dirty="0">
-                <a:solidFill>
-                  <a:schemeClr val="tx1"/>
-                </a:solidFill>
-              </a:rPr>
-              <a:t>Evènement environnementaux extrêmes (canicules, ouragans, inondations…) : </a:t>
-            </a:r>
-          </a:p>
-          <a:p>
-            <a:r>
-              <a:rPr lang="fr-FR" dirty="0">
-                <a:solidFill>
-                  <a:schemeClr val="tx1"/>
-                </a:solidFill>
-              </a:rPr>
-              <a:t>des évènements qui touche une étendue géographique, pas un seul point isolé.</a:t>
-            </a:r>
+            <a:pPr marL="228600" indent="-228600">
+              <a:spcAft>
+                <a:spcPts val="1600"/>
+              </a:spcAft>
+              <a:buSzPct val="100000"/>
+              <a:buChar char="•"/>
+            </a:pPr>
+            <a:endParaRPr lang="en-US" sz="2000" b="1" dirty="0">
+              <a:solidFill>
+                <a:srgbClr val="1B2430"/>
+              </a:solidFill>
+              <a:latin typeface="Calibri" pitchFamily="34" charset="0"/>
+              <a:ea typeface="Calibri" pitchFamily="34" charset="-122"/>
+              <a:cs typeface="Calibri" pitchFamily="34" charset="-120"/>
+            </a:endParaRPr>
+          </a:p>
+          <a:p>
+            <a:pPr>
+              <a:spcAft>
+                <a:spcPts val="1600"/>
+              </a:spcAft>
+              <a:buSzPct val="100000"/>
+            </a:pPr>
+            <a:r>
+              <a:rPr lang="en-US" sz="2400" dirty="0">
+                <a:solidFill>
+                  <a:srgbClr val="1B2430"/>
+                </a:solidFill>
+                <a:latin typeface="Calibri" pitchFamily="34" charset="0"/>
+                <a:ea typeface="Calibri" pitchFamily="34" charset="-122"/>
+                <a:cs typeface="Calibri" pitchFamily="34" charset="-120"/>
+              </a:rPr>
+              <a:t>Deux </a:t>
+            </a:r>
+            <a:r>
+              <a:rPr lang="en-US" sz="2400" dirty="0" err="1">
+                <a:solidFill>
+                  <a:srgbClr val="1B2430"/>
+                </a:solidFill>
+                <a:latin typeface="Calibri" pitchFamily="34" charset="0"/>
+                <a:ea typeface="Calibri" pitchFamily="34" charset="-122"/>
+                <a:cs typeface="Calibri" pitchFamily="34" charset="-120"/>
+              </a:rPr>
+              <a:t>localisations</a:t>
+            </a:r>
+            <a:r>
+              <a:rPr lang="en-US" sz="2400" dirty="0">
+                <a:solidFill>
+                  <a:srgbClr val="1B2430"/>
+                </a:solidFill>
+                <a:latin typeface="Calibri" pitchFamily="34" charset="0"/>
+                <a:ea typeface="Calibri" pitchFamily="34" charset="-122"/>
+                <a:cs typeface="Calibri" pitchFamily="34" charset="-120"/>
+              </a:rPr>
+              <a:t> </a:t>
+            </a:r>
+            <a:r>
+              <a:rPr lang="en-US" sz="2400" b="1" dirty="0">
+                <a:solidFill>
+                  <a:srgbClr val="1B2430"/>
+                </a:solidFill>
+                <a:latin typeface="Calibri" pitchFamily="34" charset="0"/>
+                <a:ea typeface="Calibri" pitchFamily="34" charset="-122"/>
+                <a:cs typeface="Calibri" pitchFamily="34" charset="-120"/>
+              </a:rPr>
+              <a:t>x1</a:t>
+            </a:r>
+            <a:r>
+              <a:rPr lang="en-US" sz="2400" dirty="0">
+                <a:solidFill>
+                  <a:srgbClr val="1B2430"/>
+                </a:solidFill>
+                <a:latin typeface="Calibri" pitchFamily="34" charset="0"/>
+                <a:ea typeface="Calibri" pitchFamily="34" charset="-122"/>
+                <a:cs typeface="Calibri" pitchFamily="34" charset="-120"/>
+              </a:rPr>
+              <a:t> et </a:t>
+            </a:r>
+            <a:r>
+              <a:rPr lang="en-US" sz="2400" b="1" dirty="0">
+                <a:solidFill>
+                  <a:srgbClr val="1B2430"/>
+                </a:solidFill>
+                <a:latin typeface="Calibri" pitchFamily="34" charset="0"/>
+                <a:ea typeface="Calibri" pitchFamily="34" charset="-122"/>
+                <a:cs typeface="Calibri" pitchFamily="34" charset="-120"/>
+              </a:rPr>
+              <a:t>x2</a:t>
+            </a:r>
+            <a:r>
+              <a:rPr lang="en-US" sz="2400" dirty="0">
+                <a:solidFill>
+                  <a:srgbClr val="1B2430"/>
+                </a:solidFill>
+                <a:latin typeface="Calibri" pitchFamily="34" charset="0"/>
+                <a:ea typeface="Calibri" pitchFamily="34" charset="-122"/>
+                <a:cs typeface="Calibri" pitchFamily="34" charset="-120"/>
+              </a:rPr>
+              <a:t> dans un processus max-stable simple </a:t>
+            </a:r>
+            <a:r>
+              <a:rPr lang="en-US" sz="2000" dirty="0">
+                <a:solidFill>
+                  <a:srgbClr val="1B2430"/>
+                </a:solidFill>
+                <a:latin typeface="Calibri" pitchFamily="34" charset="0"/>
+                <a:ea typeface="Calibri" pitchFamily="34" charset="-122"/>
+                <a:cs typeface="Calibri" pitchFamily="34" charset="-120"/>
+              </a:rPr>
+              <a:t>.</a:t>
+            </a:r>
+          </a:p>
+          <a:p>
+            <a:pPr marL="228600" indent="-228600">
+              <a:spcAft>
+                <a:spcPts val="1600"/>
+              </a:spcAft>
+              <a:buSzPct val="100000"/>
+              <a:buChar char="•"/>
+            </a:pPr>
+            <a:endParaRPr lang="en-US" sz="2000" dirty="0"/>
+          </a:p>
+          <a:p>
+            <a:pPr>
+              <a:spcAft>
+                <a:spcPts val="1600"/>
+              </a:spcAft>
+              <a:buSzPct val="100000"/>
+            </a:pPr>
+            <a:endParaRPr lang="en-US" sz="2000" b="1" dirty="0">
+              <a:solidFill>
+                <a:srgbClr val="1B2430"/>
+              </a:solidFill>
+              <a:latin typeface="Calibri" pitchFamily="34" charset="0"/>
+              <a:ea typeface="Calibri" pitchFamily="34" charset="-122"/>
+              <a:cs typeface="Calibri" pitchFamily="34" charset="-120"/>
+            </a:endParaRPr>
+          </a:p>
+          <a:p>
+            <a:pPr>
+              <a:spcAft>
+                <a:spcPts val="1600"/>
+              </a:spcAft>
+              <a:buSzPct val="100000"/>
+            </a:pPr>
+            <a:r>
+              <a:rPr lang="en-US" sz="1600" b="1" dirty="0">
+                <a:solidFill>
+                  <a:srgbClr val="1B2430"/>
+                </a:solidFill>
+                <a:latin typeface="Calibri" pitchFamily="34" charset="0"/>
+                <a:ea typeface="Calibri" pitchFamily="34" charset="-122"/>
+                <a:cs typeface="Calibri" pitchFamily="34" charset="-120"/>
+              </a:rPr>
+              <a:t>Dependance parfait                               </a:t>
+            </a:r>
+            <a:r>
+              <a:rPr lang="en-US" sz="1600" b="1" dirty="0" err="1">
+                <a:solidFill>
+                  <a:srgbClr val="1B2430"/>
+                </a:solidFill>
+                <a:latin typeface="Calibri" pitchFamily="34" charset="0"/>
+                <a:ea typeface="Calibri" pitchFamily="34" charset="-122"/>
+                <a:cs typeface="Calibri" pitchFamily="34" charset="-120"/>
+              </a:rPr>
+              <a:t>Dépendance</a:t>
+            </a:r>
+            <a:r>
+              <a:rPr lang="en-US" sz="1600" b="1" dirty="0">
+                <a:solidFill>
+                  <a:srgbClr val="1B2430"/>
+                </a:solidFill>
+                <a:latin typeface="Calibri" pitchFamily="34" charset="0"/>
+                <a:ea typeface="Calibri" pitchFamily="34" charset="-122"/>
+                <a:cs typeface="Calibri" pitchFamily="34" charset="-120"/>
+              </a:rPr>
+              <a:t> </a:t>
+            </a:r>
+            <a:r>
+              <a:rPr lang="en-US" sz="1600" b="1" dirty="0" err="1">
+                <a:solidFill>
+                  <a:srgbClr val="1B2430"/>
+                </a:solidFill>
+                <a:latin typeface="Calibri" pitchFamily="34" charset="0"/>
+                <a:ea typeface="Calibri" pitchFamily="34" charset="-122"/>
+                <a:cs typeface="Calibri" pitchFamily="34" charset="-120"/>
+              </a:rPr>
+              <a:t>intermédiare</a:t>
+            </a:r>
+            <a:r>
+              <a:rPr lang="en-US" sz="1600" b="1" dirty="0">
+                <a:solidFill>
+                  <a:srgbClr val="1B2430"/>
+                </a:solidFill>
+                <a:latin typeface="Calibri" pitchFamily="34" charset="0"/>
+                <a:ea typeface="Calibri" pitchFamily="34" charset="-122"/>
+                <a:cs typeface="Calibri" pitchFamily="34" charset="-120"/>
+              </a:rPr>
+              <a:t>                                                   </a:t>
+            </a:r>
+            <a:r>
+              <a:rPr lang="en-US" sz="1600" b="1" dirty="0" err="1">
+                <a:solidFill>
+                  <a:srgbClr val="1B2430"/>
+                </a:solidFill>
+                <a:latin typeface="Calibri" pitchFamily="34" charset="0"/>
+                <a:ea typeface="Calibri" pitchFamily="34" charset="-122"/>
+                <a:cs typeface="Calibri" pitchFamily="34" charset="-120"/>
+              </a:rPr>
+              <a:t>Indépendance</a:t>
+            </a:r>
+            <a:r>
+              <a:rPr lang="en-US" sz="1600" b="1" dirty="0">
+                <a:solidFill>
+                  <a:srgbClr val="1B2430"/>
+                </a:solidFill>
+                <a:latin typeface="Calibri" pitchFamily="34" charset="0"/>
+                <a:ea typeface="Calibri" pitchFamily="34" charset="-122"/>
+                <a:cs typeface="Calibri" pitchFamily="34" charset="-120"/>
+              </a:rPr>
+              <a:t> des extreme</a:t>
+            </a:r>
+          </a:p>
+          <a:p>
+            <a:pPr>
+              <a:spcAft>
+                <a:spcPts val="1600"/>
+              </a:spcAft>
+              <a:buSzPct val="100000"/>
+            </a:pPr>
+            <a:r>
+              <a:rPr lang="en-US" sz="1600" b="1" dirty="0">
+                <a:solidFill>
+                  <a:srgbClr val="1B2430"/>
+                </a:solidFill>
+                <a:latin typeface="Calibri" pitchFamily="34" charset="0"/>
+                <a:ea typeface="Calibri" pitchFamily="34" charset="-122"/>
+                <a:cs typeface="Calibri" pitchFamily="34" charset="-120"/>
+              </a:rPr>
+              <a:t>des extremes</a:t>
+            </a:r>
+          </a:p>
+          <a:p>
+            <a:pPr marL="228600" indent="-228600">
+              <a:spcAft>
+                <a:spcPts val="1600"/>
+              </a:spcAft>
+              <a:buSzPct val="100000"/>
+              <a:buChar char="•"/>
+            </a:pPr>
+            <a:endParaRPr lang="en-US" sz="2000" dirty="0"/>
           </a:p>
         </p:txBody>
       </p:sp>
@@ -3848,7 +3698,7 @@
           <p:cNvPr id="8" name="Rectangle : coins arrondis 7">
             <a:extLst>
               <a:ext uri="{FF2B5EF4-FFF2-40B4-BE49-F238E27FC236}">
-                <a16:creationId xmlns:a16="http://schemas.microsoft.com/office/drawing/2014/main" id="{F4736954-6508-E726-37BA-33030646B0D7}"/>
+                <a16:creationId xmlns:a16="http://schemas.microsoft.com/office/drawing/2014/main" id="{8A3AAD72-73F4-AD71-831D-645A4A6418F8}"/>
               </a:ext>
             </a:extLst>
           </p:cNvPr>
@@ -3857,7 +3707,7 @@
         </p:nvSpPr>
         <p:spPr>
           <a:xfrm>
-            <a:off x="620485" y="1274668"/>
+            <a:off x="620483" y="1181358"/>
             <a:ext cx="10308771" cy="380480"/>
           </a:xfrm>
           <a:prstGeom prst="roundRect">
@@ -3886,120 +3736,7 @@
           <a:p>
             <a:r>
               <a:rPr lang="fr-FR" sz="2400" dirty="0"/>
-              <a:t>Aléa climatique</a:t>
-            </a:r>
-          </a:p>
-        </p:txBody>
-      </p:sp>
-      <p:sp>
-        <p:nvSpPr>
-          <p:cNvPr id="10" name="Rectangle : coins arrondis 9">
-            <a:extLst>
-              <a:ext uri="{FF2B5EF4-FFF2-40B4-BE49-F238E27FC236}">
-                <a16:creationId xmlns:a16="http://schemas.microsoft.com/office/drawing/2014/main" id="{D5DF1FF2-4B51-7125-0618-054FCDD73A51}"/>
-              </a:ext>
-            </a:extLst>
-          </p:cNvPr>
-          <p:cNvSpPr/>
-          <p:nvPr/>
-        </p:nvSpPr>
-        <p:spPr>
-          <a:xfrm>
-            <a:off x="620485" y="2896121"/>
-            <a:ext cx="10308771" cy="380480"/>
-          </a:xfrm>
-          <a:prstGeom prst="roundRect">
-            <a:avLst/>
-          </a:prstGeom>
-        </p:spPr>
-        <p:style>
-          <a:lnRef idx="2">
-            <a:schemeClr val="accent1">
-              <a:shade val="15000"/>
-            </a:schemeClr>
-          </a:lnRef>
-          <a:fillRef idx="1">
-            <a:schemeClr val="accent1"/>
-          </a:fillRef>
-          <a:effectRef idx="0">
-            <a:schemeClr val="accent1"/>
-          </a:effectRef>
-          <a:fontRef idx="minor">
-            <a:schemeClr val="lt1"/>
-          </a:fontRef>
-        </p:style>
-        <p:txBody>
-          <a:bodyPr rtlCol="0" anchor="ctr"/>
-          <a:lstStyle/>
-          <a:p>
-            <a:r>
-              <a:rPr lang="fr-FR" sz="2400" dirty="0"/>
-              <a:t>Décisions des autorités</a:t>
-            </a:r>
-          </a:p>
-        </p:txBody>
-      </p:sp>
-      <p:sp>
-        <p:nvSpPr>
-          <p:cNvPr id="13" name="Rectangle 12">
-            <a:extLst>
-              <a:ext uri="{FF2B5EF4-FFF2-40B4-BE49-F238E27FC236}">
-                <a16:creationId xmlns:a16="http://schemas.microsoft.com/office/drawing/2014/main" id="{F509E99E-50FB-149D-B1DA-EC87A093C72C}"/>
-              </a:ext>
-            </a:extLst>
-          </p:cNvPr>
-          <p:cNvSpPr/>
-          <p:nvPr/>
-        </p:nvSpPr>
-        <p:spPr>
-          <a:xfrm>
-            <a:off x="620485" y="3286835"/>
-            <a:ext cx="10308771" cy="1067319"/>
-          </a:xfrm>
-          <a:prstGeom prst="rect">
-            <a:avLst/>
-          </a:prstGeom>
-          <a:solidFill>
-            <a:schemeClr val="bg1"/>
-          </a:solidFill>
-        </p:spPr>
-        <p:style>
-          <a:lnRef idx="2">
-            <a:schemeClr val="accent1">
-              <a:shade val="15000"/>
-            </a:schemeClr>
-          </a:lnRef>
-          <a:fillRef idx="1">
-            <a:schemeClr val="accent1"/>
-          </a:fillRef>
-          <a:effectRef idx="0">
-            <a:schemeClr val="accent1"/>
-          </a:effectRef>
-          <a:fontRef idx="minor">
-            <a:schemeClr val="lt1"/>
-          </a:fontRef>
-        </p:style>
-        <p:txBody>
-          <a:bodyPr rtlCol="0" anchor="ctr"/>
-          <a:lstStyle/>
-          <a:p>
-            <a:r>
-              <a:rPr lang="fr-FR" dirty="0">
-                <a:solidFill>
-                  <a:schemeClr val="tx1"/>
-                </a:solidFill>
-              </a:rPr>
-              <a:t>Où est-il raisonnable de construire ?</a:t>
-            </a:r>
-          </a:p>
-          <a:p>
-            <a:r>
-              <a:rPr lang="fr-FR" dirty="0">
-                <a:solidFill>
-                  <a:schemeClr val="tx1"/>
-                </a:solidFill>
-              </a:rPr>
-              <a:t>Quelles zones classer à risque ?</a:t>
+              <a:t>Définition </a:t>
             </a:r>
           </a:p>
         </p:txBody>
@@ -4009,1102 +3746,7 @@
           <p:cNvPr id="15" name="Rectangle : coins arrondis 14">
             <a:extLst>
               <a:ext uri="{FF2B5EF4-FFF2-40B4-BE49-F238E27FC236}">
-                <a16:creationId xmlns:a16="http://schemas.microsoft.com/office/drawing/2014/main" id="{74960A2B-1F31-4D99-A990-82A33BDD1BFF}"/>
-              </a:ext>
-            </a:extLst>
-          </p:cNvPr>
-          <p:cNvSpPr/>
-          <p:nvPr/>
-        </p:nvSpPr>
-        <p:spPr>
-          <a:xfrm>
-            <a:off x="620484" y="4528978"/>
-            <a:ext cx="10308771" cy="380480"/>
-          </a:xfrm>
-          <a:prstGeom prst="roundRect">
-            <a:avLst/>
-          </a:prstGeom>
-        </p:spPr>
-        <p:style>
-          <a:lnRef idx="2">
-            <a:schemeClr val="accent1">
-              <a:shade val="15000"/>
-            </a:schemeClr>
-          </a:lnRef>
-          <a:fillRef idx="1">
-            <a:schemeClr val="accent1"/>
-          </a:fillRef>
-          <a:effectRef idx="0">
-            <a:schemeClr val="accent1"/>
-          </a:effectRef>
-          <a:fontRef idx="minor">
-            <a:schemeClr val="lt1"/>
-          </a:fontRef>
-        </p:style>
-        <p:txBody>
-          <a:bodyPr rtlCol="0" anchor="ctr"/>
-          <a:lstStyle/>
-          <a:p>
-            <a:r>
-              <a:rPr lang="fr-FR" sz="2400" dirty="0"/>
-              <a:t>Portefeuille d’assurance</a:t>
-            </a:r>
-          </a:p>
-        </p:txBody>
-      </p:sp>
-      <p:sp>
-        <p:nvSpPr>
-          <p:cNvPr id="17" name="Rectangle 16">
-            <a:extLst>
-              <a:ext uri="{FF2B5EF4-FFF2-40B4-BE49-F238E27FC236}">
-                <a16:creationId xmlns:a16="http://schemas.microsoft.com/office/drawing/2014/main" id="{642E0BBC-94DF-CDA2-A069-72E8064AAD50}"/>
-              </a:ext>
-            </a:extLst>
-          </p:cNvPr>
-          <p:cNvSpPr/>
-          <p:nvPr/>
-        </p:nvSpPr>
-        <p:spPr>
-          <a:xfrm>
-            <a:off x="620484" y="4909458"/>
-            <a:ext cx="10308771" cy="1067319"/>
-          </a:xfrm>
-          <a:prstGeom prst="rect">
-            <a:avLst/>
-          </a:prstGeom>
-          <a:solidFill>
-            <a:schemeClr val="bg1"/>
-          </a:solidFill>
-        </p:spPr>
-        <p:style>
-          <a:lnRef idx="2">
-            <a:schemeClr val="accent1">
-              <a:shade val="15000"/>
-            </a:schemeClr>
-          </a:lnRef>
-          <a:fillRef idx="1">
-            <a:schemeClr val="accent1"/>
-          </a:fillRef>
-          <a:effectRef idx="0">
-            <a:schemeClr val="accent1"/>
-          </a:effectRef>
-          <a:fontRef idx="minor">
-            <a:schemeClr val="lt1"/>
-          </a:fontRef>
-        </p:style>
-        <p:txBody>
-          <a:bodyPr rtlCol="0" anchor="ctr"/>
-          <a:lstStyle/>
-          <a:p>
-            <a:pPr>
-              <a:lnSpc>
-                <a:spcPct val="125000"/>
-              </a:lnSpc>
-            </a:pPr>
-            <a:r>
-              <a:rPr lang="en-US" dirty="0">
-                <a:solidFill>
-                  <a:schemeClr val="tx1"/>
-                </a:solidFill>
-                <a:latin typeface="Calibri" pitchFamily="34" charset="0"/>
-                <a:ea typeface="Calibri" pitchFamily="34" charset="-122"/>
-                <a:cs typeface="Calibri" pitchFamily="34" charset="-120"/>
-              </a:rPr>
-              <a:t>Le choix de la zone géographique de souscription determine directement l’exposition au risque.</a:t>
-            </a:r>
-            <a:endParaRPr lang="en-US" dirty="0">
-              <a:solidFill>
-                <a:schemeClr val="tx1"/>
-              </a:solidFill>
-            </a:endParaRPr>
-          </a:p>
-        </p:txBody>
-      </p:sp>
-    </p:spTree>
-    <p:extLst>
-      <p:ext uri="{BB962C8B-B14F-4D97-AF65-F5344CB8AC3E}">
-        <p14:creationId xmlns:p14="http://schemas.microsoft.com/office/powerpoint/2010/main" val="1788338259"/>
-      </p:ext>
-    </p:extLst>
-  </p:cSld>
-  <p:clrMapOvr>
-    <a:masterClrMapping/>
-  </p:clrMapOvr>
-</p:sld>
-</file>
-
-<file path=ppt/slides/slide3.xml><?xml version="1.0" encoding="utf-8"?>
-<p:sld xmlns:a="http://schemas.openxmlformats.org/drawingml/2006/main" xmlns:r="http://schemas.openxmlformats.org/officeDocument/2006/relationships" xmlns:p="http://schemas.openxmlformats.org/presentationml/2006/main">
-  <p:cSld>
-    <p:spTree>
-      <p:nvGrpSpPr>
-        <p:cNvPr id="1" name="">
-          <a:extLst>
-            <a:ext uri="{FF2B5EF4-FFF2-40B4-BE49-F238E27FC236}">
-              <a16:creationId xmlns:a16="http://schemas.microsoft.com/office/drawing/2014/main" id="{6DDCECBC-3B52-4B63-541D-D70BC512D018}"/>
-            </a:ext>
-          </a:extLst>
-        </p:cNvPr>
-        <p:cNvGrpSpPr/>
-        <p:nvPr/>
-      </p:nvGrpSpPr>
-      <p:grpSpPr>
-        <a:xfrm>
-          <a:off x="0" y="0"/>
-          <a:ext cx="0" cy="0"/>
-          <a:chOff x="0" y="0"/>
-          <a:chExt cx="0" cy="0"/>
-        </a:xfrm>
-      </p:grpSpPr>
-      <p:sp>
-        <p:nvSpPr>
-          <p:cNvPr id="3" name="Rectangle 2">
-            <a:extLst>
-              <a:ext uri="{FF2B5EF4-FFF2-40B4-BE49-F238E27FC236}">
-                <a16:creationId xmlns:a16="http://schemas.microsoft.com/office/drawing/2014/main" id="{CF519A28-2A6E-A4D7-5863-BB779C0A4588}"/>
-              </a:ext>
-            </a:extLst>
-          </p:cNvPr>
-          <p:cNvSpPr/>
-          <p:nvPr/>
-        </p:nvSpPr>
-        <p:spPr>
-          <a:xfrm>
-            <a:off x="0" y="0"/>
-            <a:ext cx="12192000" cy="708091"/>
-          </a:xfrm>
-          <a:prstGeom prst="rect">
-            <a:avLst/>
-          </a:prstGeom>
-        </p:spPr>
-        <p:style>
-          <a:lnRef idx="2">
-            <a:schemeClr val="accent1">
-              <a:shade val="15000"/>
-            </a:schemeClr>
-          </a:lnRef>
-          <a:fillRef idx="1">
-            <a:schemeClr val="accent1"/>
-          </a:fillRef>
-          <a:effectRef idx="0">
-            <a:schemeClr val="accent1"/>
-          </a:effectRef>
-          <a:fontRef idx="minor">
-            <a:schemeClr val="lt1"/>
-          </a:fontRef>
-        </p:style>
-        <p:txBody>
-          <a:bodyPr rtlCol="0" anchor="ctr"/>
-          <a:lstStyle/>
-          <a:p>
-            <a:r>
-              <a:rPr lang="fr-FR" sz="2800" dirty="0"/>
-              <a:t>CONTEXTE ET MOTIVATION</a:t>
-            </a:r>
-          </a:p>
-        </p:txBody>
-      </p:sp>
-      <mc:AlternateContent xmlns:mc="http://schemas.openxmlformats.org/markup-compatibility/2006" xmlns:a14="http://schemas.microsoft.com/office/drawing/2010/main">
-        <mc:Choice Requires="a14">
-          <p:sp>
-            <p:nvSpPr>
-              <p:cNvPr id="7" name="Rectangle 6">
-                <a:extLst>
-                  <a:ext uri="{FF2B5EF4-FFF2-40B4-BE49-F238E27FC236}">
-                    <a16:creationId xmlns:a16="http://schemas.microsoft.com/office/drawing/2014/main" id="{5A8E4FFE-8178-B87D-53A2-91AA17AE7CC2}"/>
-                  </a:ext>
-                </a:extLst>
-              </p:cNvPr>
-              <p:cNvSpPr/>
-              <p:nvPr/>
-            </p:nvSpPr>
-            <p:spPr>
-              <a:xfrm>
-                <a:off x="620485" y="1665513"/>
-                <a:ext cx="10308771" cy="2939143"/>
-              </a:xfrm>
-              <a:prstGeom prst="rect">
-                <a:avLst/>
-              </a:prstGeom>
-              <a:solidFill>
-                <a:schemeClr val="bg1"/>
-              </a:solidFill>
-            </p:spPr>
-            <p:style>
-              <a:lnRef idx="2">
-                <a:schemeClr val="accent1">
-                  <a:shade val="15000"/>
-                </a:schemeClr>
-              </a:lnRef>
-              <a:fillRef idx="1">
-                <a:schemeClr val="accent1"/>
-              </a:fillRef>
-              <a:effectRef idx="0">
-                <a:schemeClr val="accent1"/>
-              </a:effectRef>
-              <a:fontRef idx="minor">
-                <a:schemeClr val="lt1"/>
-              </a:fontRef>
-            </p:style>
-            <p:txBody>
-              <a:bodyPr rtlCol="0" anchor="ctr"/>
-              <a:lstStyle/>
-              <a:p>
-                <a:pPr marL="228600" indent="-228600">
-                  <a:spcAft>
-                    <a:spcPts val="1600"/>
-                  </a:spcAft>
-                  <a:buSzPct val="100000"/>
-                  <a:buChar char="•"/>
-                </a:pPr>
-                <a:r>
-                  <a:rPr lang="en-US" sz="2000" b="1" dirty="0">
-                    <a:solidFill>
-                      <a:srgbClr val="1B2430"/>
-                    </a:solidFill>
-                    <a:latin typeface="Calibri" pitchFamily="34" charset="0"/>
-                    <a:ea typeface="Calibri" pitchFamily="34" charset="-122"/>
-                    <a:cs typeface="Calibri" pitchFamily="34" charset="-120"/>
-                  </a:rPr>
-                  <a:t>Idée intuitive </a:t>
-                </a:r>
-                <a:r>
-                  <a:rPr lang="en-US" sz="2000" dirty="0">
-                    <a:solidFill>
-                      <a:srgbClr val="1B2430"/>
-                    </a:solidFill>
-                    <a:latin typeface="Calibri" pitchFamily="34" charset="0"/>
-                    <a:ea typeface="Calibri" pitchFamily="34" charset="-122"/>
-                    <a:cs typeface="Calibri" pitchFamily="34" charset="-120"/>
-                  </a:rPr>
-                  <a:t>: appliquer une mesure de risque Π (variance, </a:t>
-                </a:r>
-                <a:r>
-                  <a:rPr lang="en-US" sz="2000" dirty="0" err="1">
-                    <a:solidFill>
-                      <a:srgbClr val="1B2430"/>
-                    </a:solidFill>
-                    <a:latin typeface="Calibri" pitchFamily="34" charset="0"/>
-                    <a:ea typeface="Calibri" pitchFamily="34" charset="-122"/>
-                    <a:cs typeface="Calibri" pitchFamily="34" charset="-120"/>
-                  </a:rPr>
-                  <a:t>VaR.</a:t>
-                </a:r>
-                <a:r>
-                  <a:rPr lang="en-US" sz="2000" dirty="0">
-                    <a:solidFill>
-                      <a:srgbClr val="1B2430"/>
-                    </a:solidFill>
-                    <a:latin typeface="Calibri" pitchFamily="34" charset="0"/>
-                    <a:ea typeface="Calibri" pitchFamily="34" charset="-122"/>
-                    <a:cs typeface="Calibri" pitchFamily="34" charset="-120"/>
-                  </a:rPr>
-                  <a:t>..) </a:t>
-                </a:r>
-                <a:r>
-                  <a:rPr lang="en-US" sz="2000" dirty="0" err="1">
-                    <a:solidFill>
-                      <a:srgbClr val="1B2430"/>
-                    </a:solidFill>
-                    <a:latin typeface="Calibri" pitchFamily="34" charset="0"/>
-                    <a:ea typeface="Calibri" pitchFamily="34" charset="-122"/>
-                    <a:cs typeface="Calibri" pitchFamily="34" charset="-120"/>
-                  </a:rPr>
-                  <a:t>en</a:t>
-                </a:r>
-                <a:r>
-                  <a:rPr lang="en-US" sz="2000" dirty="0">
-                    <a:solidFill>
-                      <a:srgbClr val="1B2430"/>
-                    </a:solidFill>
-                    <a:latin typeface="Calibri" pitchFamily="34" charset="0"/>
-                    <a:ea typeface="Calibri" pitchFamily="34" charset="-122"/>
-                    <a:cs typeface="Calibri" pitchFamily="34" charset="-120"/>
-                  </a:rPr>
-                  <a:t> </a:t>
-                </a:r>
-                <a:r>
-                  <a:rPr lang="en-US" sz="2000" dirty="0" err="1">
-                    <a:solidFill>
-                      <a:srgbClr val="1B2430"/>
-                    </a:solidFill>
-                    <a:latin typeface="Calibri" pitchFamily="34" charset="0"/>
-                    <a:ea typeface="Calibri" pitchFamily="34" charset="-122"/>
-                    <a:cs typeface="Calibri" pitchFamily="34" charset="-120"/>
-                  </a:rPr>
-                  <a:t>chaque</a:t>
-                </a:r>
-                <a:r>
-                  <a:rPr lang="en-US" sz="2000" dirty="0">
-                    <a:solidFill>
-                      <a:srgbClr val="1B2430"/>
-                    </a:solidFill>
-                    <a:latin typeface="Calibri" pitchFamily="34" charset="0"/>
-                    <a:ea typeface="Calibri" pitchFamily="34" charset="-122"/>
-                    <a:cs typeface="Calibri" pitchFamily="34" charset="-120"/>
-                  </a:rPr>
-                  <a:t> point, </a:t>
-                </a:r>
-                <a:r>
-                  <a:rPr lang="en-US" sz="2000" dirty="0" err="1">
-                    <a:solidFill>
-                      <a:srgbClr val="1B2430"/>
-                    </a:solidFill>
-                    <a:latin typeface="Calibri" pitchFamily="34" charset="0"/>
-                    <a:ea typeface="Calibri" pitchFamily="34" charset="-122"/>
-                    <a:cs typeface="Calibri" pitchFamily="34" charset="-120"/>
-                  </a:rPr>
-                  <a:t>puis</a:t>
-                </a:r>
-                <a:r>
-                  <a:rPr lang="en-US" sz="2000" dirty="0">
-                    <a:solidFill>
-                      <a:srgbClr val="1B2430"/>
-                    </a:solidFill>
-                    <a:latin typeface="Calibri" pitchFamily="34" charset="0"/>
-                    <a:ea typeface="Calibri" pitchFamily="34" charset="-122"/>
-                    <a:cs typeface="Calibri" pitchFamily="34" charset="-120"/>
-                  </a:rPr>
-                  <a:t> moyenner sur la région A.</a:t>
-                </a:r>
-              </a:p>
-              <a:p>
-                <a:pPr>
-                  <a:spcAft>
-                    <a:spcPts val="1600"/>
-                  </a:spcAft>
-                  <a:buSzPct val="100000"/>
-                </a:pPr>
-                <a14:m>
-                  <m:oMathPara xmlns:m="http://schemas.openxmlformats.org/officeDocument/2006/math">
-                    <m:oMath>
-                      <m:r>
-                        <a:rPr lang="en-US" sz="2000" i="1" dirty="0">
-                          <a:solidFill>
-                            <a:schemeClr val="tx1"/>
-                          </a:solidFill>
-                          <a:latin typeface="Cambria Math" panose="02040503050406030204" pitchFamily="18" charset="0"/>
-                        </a:rPr>
-                        <m:t>𝛱</m:t>
-                      </m:r>
-                      <m:d>
-                        <m:dPr>
-                          <m:ctrlPr>
-                            <a:rPr lang="en-US" sz="2000" i="1" dirty="0">
-                              <a:solidFill>
-                                <a:schemeClr val="tx1"/>
-                              </a:solidFill>
-                              <a:latin typeface="Cambria Math" panose="02040503050406030204" pitchFamily="18" charset="0"/>
-                            </a:rPr>
-                          </m:ctrlPr>
-                        </m:dPr>
-                        <m:e>
-                          <m:sSub>
-                            <m:sSubPr>
-                              <m:ctrlPr>
-                                <a:rPr lang="en-US" sz="2000" i="1" dirty="0">
-                                  <a:solidFill>
-                                    <a:schemeClr val="tx1"/>
-                                  </a:solidFill>
-                                  <a:latin typeface="Cambria Math" panose="02040503050406030204" pitchFamily="18" charset="0"/>
-                                </a:rPr>
-                              </m:ctrlPr>
-                            </m:sSubPr>
-                            <m:e>
-                              <m:r>
-                                <a:rPr lang="en-US" sz="2000" i="1" dirty="0">
-                                  <a:solidFill>
-                                    <a:schemeClr val="tx1"/>
-                                  </a:solidFill>
-                                  <a:latin typeface="Cambria Math" panose="02040503050406030204" pitchFamily="18" charset="0"/>
-                                </a:rPr>
-                                <m:t>𝐶</m:t>
-                              </m:r>
-                            </m:e>
-                            <m:sub>
-                              <m:r>
-                                <a:rPr lang="en-US" sz="2000" i="1" dirty="0">
-                                  <a:solidFill>
-                                    <a:schemeClr val="tx1"/>
-                                  </a:solidFill>
-                                  <a:latin typeface="Cambria Math" panose="02040503050406030204" pitchFamily="18" charset="0"/>
-                                </a:rPr>
-                                <m:t>𝑃</m:t>
-                              </m:r>
-                            </m:sub>
-                          </m:sSub>
-                          <m:d>
-                            <m:dPr>
-                              <m:ctrlPr>
-                                <a:rPr lang="en-US" sz="2000" i="1" dirty="0">
-                                  <a:solidFill>
-                                    <a:schemeClr val="tx1"/>
-                                  </a:solidFill>
-                                  <a:latin typeface="Cambria Math" panose="02040503050406030204" pitchFamily="18" charset="0"/>
-                                </a:rPr>
-                              </m:ctrlPr>
-                            </m:dPr>
-                            <m:e>
-                              <m:r>
-                                <a:rPr lang="en-US" sz="2000" i="1" dirty="0">
-                                  <a:solidFill>
-                                    <a:schemeClr val="tx1"/>
-                                  </a:solidFill>
-                                  <a:latin typeface="Cambria Math" panose="02040503050406030204" pitchFamily="18" charset="0"/>
-                                </a:rPr>
-                                <m:t>𝑥</m:t>
-                              </m:r>
-                            </m:e>
-                          </m:d>
-                        </m:e>
-                      </m:d>
-                      <m:r>
-                        <a:rPr lang="en-US" sz="2000" i="0" dirty="0">
-                          <a:solidFill>
-                            <a:schemeClr val="tx1"/>
-                          </a:solidFill>
-                          <a:latin typeface="Cambria Math" panose="02040503050406030204" pitchFamily="18" charset="0"/>
-                        </a:rPr>
-                        <m:t>=</m:t>
-                      </m:r>
-                      <m:f>
-                        <m:fPr>
-                          <m:ctrlPr>
-                            <a:rPr lang="en-US" sz="2000" i="0" dirty="0">
-                              <a:solidFill>
-                                <a:schemeClr val="tx1"/>
-                              </a:solidFill>
-                              <a:latin typeface="Cambria Math" panose="02040503050406030204" pitchFamily="18" charset="0"/>
-                            </a:rPr>
-                          </m:ctrlPr>
-                        </m:fPr>
-                        <m:num>
-                          <m:r>
-                            <a:rPr lang="en-US" sz="2000" i="0" dirty="0">
-                              <a:solidFill>
-                                <a:schemeClr val="tx1"/>
-                              </a:solidFill>
-                              <a:latin typeface="Cambria Math" panose="02040503050406030204" pitchFamily="18" charset="0"/>
-                            </a:rPr>
-                            <m:t>1</m:t>
-                          </m:r>
-                        </m:num>
-                        <m:den>
-                          <m:d>
-                            <m:dPr>
-                              <m:begChr m:val="|"/>
-                              <m:endChr m:val="|"/>
-                              <m:ctrlPr>
-                                <a:rPr lang="en-US" sz="2000" i="1" dirty="0">
-                                  <a:solidFill>
-                                    <a:schemeClr val="tx1"/>
-                                  </a:solidFill>
-                                  <a:latin typeface="Cambria Math" panose="02040503050406030204" pitchFamily="18" charset="0"/>
-                                </a:rPr>
-                              </m:ctrlPr>
-                            </m:dPr>
-                            <m:e>
-                              <m:r>
-                                <a:rPr lang="en-US" sz="2000" i="1" dirty="0">
-                                  <a:solidFill>
-                                    <a:schemeClr val="tx1"/>
-                                  </a:solidFill>
-                                  <a:latin typeface="Cambria Math" panose="02040503050406030204" pitchFamily="18" charset="0"/>
-                                </a:rPr>
-                                <m:t>𝐴</m:t>
-                              </m:r>
-                            </m:e>
-                          </m:d>
-                        </m:den>
-                      </m:f>
-                      <m:nary>
-                        <m:naryPr>
-                          <m:limLoc m:val="subSup"/>
-                          <m:grow m:val="on"/>
-                          <m:supHide m:val="on"/>
-                          <m:ctrlPr>
-                            <a:rPr lang="en-US" sz="2000" i="1" dirty="0">
-                              <a:solidFill>
-                                <a:schemeClr val="tx1"/>
-                              </a:solidFill>
-                              <a:latin typeface="Cambria Math" panose="02040503050406030204" pitchFamily="18" charset="0"/>
-                            </a:rPr>
-                          </m:ctrlPr>
-                        </m:naryPr>
-                        <m:sub>
-                          <m:r>
-                            <a:rPr lang="en-US" sz="2000" i="1" dirty="0">
-                              <a:solidFill>
-                                <a:schemeClr val="tx1"/>
-                              </a:solidFill>
-                              <a:latin typeface="Cambria Math" panose="02040503050406030204" pitchFamily="18" charset="0"/>
-                            </a:rPr>
-                            <m:t>𝐴</m:t>
-                          </m:r>
-                        </m:sub>
-                        <m:sup/>
-                        <m:e>
-                          <m:r>
-                            <a:rPr lang="en-US" sz="2000" i="1" dirty="0">
-                              <a:solidFill>
-                                <a:schemeClr val="tx1"/>
-                              </a:solidFill>
-                              <a:latin typeface="Cambria Math" panose="02040503050406030204" pitchFamily="18" charset="0"/>
-                            </a:rPr>
-                            <m:t>𝛱</m:t>
-                          </m:r>
-                          <m:d>
-                            <m:dPr>
-                              <m:ctrlPr>
-                                <a:rPr lang="en-US" sz="2000" i="1" dirty="0">
-                                  <a:solidFill>
-                                    <a:schemeClr val="tx1"/>
-                                  </a:solidFill>
-                                  <a:latin typeface="Cambria Math" panose="02040503050406030204" pitchFamily="18" charset="0"/>
-                                </a:rPr>
-                              </m:ctrlPr>
-                            </m:dPr>
-                            <m:e>
-                              <m:sSub>
-                                <m:sSubPr>
-                                  <m:ctrlPr>
-                                    <a:rPr lang="en-US" sz="2000" i="1" dirty="0">
-                                      <a:solidFill>
-                                        <a:schemeClr val="tx1"/>
-                                      </a:solidFill>
-                                      <a:latin typeface="Cambria Math" panose="02040503050406030204" pitchFamily="18" charset="0"/>
-                                    </a:rPr>
-                                  </m:ctrlPr>
-                                </m:sSubPr>
-                                <m:e>
-                                  <m:r>
-                                    <a:rPr lang="en-US" sz="2000" i="1" dirty="0">
-                                      <a:solidFill>
-                                        <a:schemeClr val="tx1"/>
-                                      </a:solidFill>
-                                      <a:latin typeface="Cambria Math" panose="02040503050406030204" pitchFamily="18" charset="0"/>
-                                    </a:rPr>
-                                    <m:t>𝐶</m:t>
-                                  </m:r>
-                                </m:e>
-                                <m:sub>
-                                  <m:r>
-                                    <a:rPr lang="en-US" sz="2000" i="1" dirty="0">
-                                      <a:solidFill>
-                                        <a:schemeClr val="tx1"/>
-                                      </a:solidFill>
-                                      <a:latin typeface="Cambria Math" panose="02040503050406030204" pitchFamily="18" charset="0"/>
-                                    </a:rPr>
-                                    <m:t>𝑃</m:t>
-                                  </m:r>
-                                </m:sub>
-                              </m:sSub>
-                              <m:d>
-                                <m:dPr>
-                                  <m:ctrlPr>
-                                    <a:rPr lang="en-US" sz="2000" i="1" dirty="0">
-                                      <a:solidFill>
-                                        <a:schemeClr val="tx1"/>
-                                      </a:solidFill>
-                                      <a:latin typeface="Cambria Math" panose="02040503050406030204" pitchFamily="18" charset="0"/>
-                                    </a:rPr>
-                                  </m:ctrlPr>
-                                </m:dPr>
-                                <m:e>
-                                  <m:r>
-                                    <a:rPr lang="en-US" sz="2000" i="1" dirty="0">
-                                      <a:solidFill>
-                                        <a:schemeClr val="tx1"/>
-                                      </a:solidFill>
-                                      <a:latin typeface="Cambria Math" panose="02040503050406030204" pitchFamily="18" charset="0"/>
-                                    </a:rPr>
-                                    <m:t>𝑥</m:t>
-                                  </m:r>
-                                </m:e>
-                              </m:d>
-                            </m:e>
-                          </m:d>
-                          <m:r>
-                            <a:rPr lang="en-US" sz="2000" i="0" dirty="0">
-                              <a:solidFill>
-                                <a:schemeClr val="tx1"/>
-                              </a:solidFill>
-                              <a:latin typeface="Cambria Math" panose="02040503050406030204" pitchFamily="18" charset="0"/>
-                            </a:rPr>
-                            <m:t>ⅆ</m:t>
-                          </m:r>
-                          <m:r>
-                            <a:rPr lang="en-US" sz="2000" i="1" dirty="0">
-                              <a:solidFill>
-                                <a:schemeClr val="tx1"/>
-                              </a:solidFill>
-                              <a:latin typeface="Cambria Math" panose="02040503050406030204" pitchFamily="18" charset="0"/>
-                            </a:rPr>
-                            <m:t>𝑥</m:t>
-                          </m:r>
-                        </m:e>
-                      </m:nary>
-                    </m:oMath>
-                  </m:oMathPara>
-                </a14:m>
-                <a:endParaRPr lang="en-US" sz="2000" dirty="0"/>
-              </a:p>
-              <a:p>
-                <a:pPr marL="228600" indent="-228600">
-                  <a:spcAft>
-                    <a:spcPts val="1600"/>
-                  </a:spcAft>
-                  <a:buSzPct val="100000"/>
-                  <a:buChar char="•"/>
-                </a:pPr>
-                <a:r>
-                  <a:rPr lang="en-US" sz="2000" b="1" dirty="0" err="1">
-                    <a:solidFill>
-                      <a:srgbClr val="1B2430"/>
-                    </a:solidFill>
-                    <a:latin typeface="Calibri" pitchFamily="34" charset="0"/>
-                    <a:ea typeface="Calibri" pitchFamily="34" charset="-122"/>
-                    <a:cs typeface="Calibri" pitchFamily="34" charset="-120"/>
-                  </a:rPr>
-                  <a:t>Problème</a:t>
-                </a:r>
-                <a:r>
-                  <a:rPr lang="en-US" sz="2000" dirty="0">
-                    <a:solidFill>
-                      <a:srgbClr val="1B2430"/>
-                    </a:solidFill>
-                    <a:latin typeface="Calibri" pitchFamily="34" charset="0"/>
-                    <a:ea typeface="Calibri" pitchFamily="34" charset="-122"/>
-                    <a:cs typeface="Calibri" pitchFamily="34" charset="-120"/>
-                  </a:rPr>
-                  <a:t> : </a:t>
-                </a:r>
-                <a:r>
-                  <a:rPr lang="en-US" sz="2000" dirty="0" err="1">
-                    <a:solidFill>
-                      <a:srgbClr val="1B2430"/>
-                    </a:solidFill>
-                    <a:latin typeface="Calibri" pitchFamily="34" charset="0"/>
-                    <a:ea typeface="Calibri" pitchFamily="34" charset="-122"/>
-                    <a:cs typeface="Calibri" pitchFamily="34" charset="-120"/>
-                  </a:rPr>
-                  <a:t>si</a:t>
-                </a:r>
-                <a:r>
-                  <a:rPr lang="en-US" sz="2000" dirty="0">
-                    <a:solidFill>
-                      <a:srgbClr val="1B2430"/>
-                    </a:solidFill>
-                    <a:latin typeface="Calibri" pitchFamily="34" charset="0"/>
-                    <a:ea typeface="Calibri" pitchFamily="34" charset="-122"/>
-                    <a:cs typeface="Calibri" pitchFamily="34" charset="-120"/>
-                  </a:rPr>
-                  <a:t> le processus de coût est stationnaire : </a:t>
-                </a:r>
-                <a14:m>
-                  <m:oMath xmlns:m="http://schemas.openxmlformats.org/officeDocument/2006/math">
-                    <m:r>
-                      <a:rPr lang="en-US" sz="2000" i="1" dirty="0">
-                        <a:solidFill>
-                          <a:schemeClr val="tx1"/>
-                        </a:solidFill>
-                        <a:latin typeface="Cambria Math" panose="02040503050406030204" pitchFamily="18" charset="0"/>
-                      </a:rPr>
-                      <m:t>𝛱</m:t>
-                    </m:r>
-                    <m:d>
-                      <m:dPr>
-                        <m:ctrlPr>
-                          <a:rPr lang="en-US" sz="2000" i="1" dirty="0">
-                            <a:solidFill>
-                              <a:schemeClr val="tx1"/>
-                            </a:solidFill>
-                            <a:latin typeface="Cambria Math" panose="02040503050406030204" pitchFamily="18" charset="0"/>
-                          </a:rPr>
-                        </m:ctrlPr>
-                      </m:dPr>
-                      <m:e>
-                        <m:sSub>
-                          <m:sSubPr>
-                            <m:ctrlPr>
-                              <a:rPr lang="en-US" sz="2000" i="1" dirty="0">
-                                <a:solidFill>
-                                  <a:schemeClr val="tx1"/>
-                                </a:solidFill>
-                                <a:latin typeface="Cambria Math" panose="02040503050406030204" pitchFamily="18" charset="0"/>
-                              </a:rPr>
-                            </m:ctrlPr>
-                          </m:sSubPr>
-                          <m:e>
-                            <m:r>
-                              <a:rPr lang="en-US" sz="2000" i="1" dirty="0">
-                                <a:solidFill>
-                                  <a:schemeClr val="tx1"/>
-                                </a:solidFill>
-                                <a:latin typeface="Cambria Math" panose="02040503050406030204" pitchFamily="18" charset="0"/>
-                              </a:rPr>
-                              <m:t>𝐶</m:t>
-                            </m:r>
-                          </m:e>
-                          <m:sub>
-                            <m:r>
-                              <a:rPr lang="en-US" sz="2000" i="1" dirty="0">
-                                <a:solidFill>
-                                  <a:schemeClr val="tx1"/>
-                                </a:solidFill>
-                                <a:latin typeface="Cambria Math" panose="02040503050406030204" pitchFamily="18" charset="0"/>
-                              </a:rPr>
-                              <m:t>𝑃</m:t>
-                            </m:r>
-                          </m:sub>
-                        </m:sSub>
-                        <m:d>
-                          <m:dPr>
-                            <m:ctrlPr>
-                              <a:rPr lang="en-US" sz="2000" i="1" dirty="0">
-                                <a:solidFill>
-                                  <a:schemeClr val="tx1"/>
-                                </a:solidFill>
-                                <a:latin typeface="Cambria Math" panose="02040503050406030204" pitchFamily="18" charset="0"/>
-                              </a:rPr>
-                            </m:ctrlPr>
-                          </m:dPr>
-                          <m:e>
-                            <m:r>
-                              <a:rPr lang="en-US" sz="2000" i="1" dirty="0">
-                                <a:solidFill>
-                                  <a:schemeClr val="tx1"/>
-                                </a:solidFill>
-                                <a:latin typeface="Cambria Math" panose="02040503050406030204" pitchFamily="18" charset="0"/>
-                              </a:rPr>
-                              <m:t>𝑥</m:t>
-                            </m:r>
-                          </m:e>
-                        </m:d>
-                      </m:e>
-                    </m:d>
-                  </m:oMath>
-                </a14:m>
-                <a:r>
-                  <a:rPr lang="en-US" sz="2000" dirty="0">
-                    <a:solidFill>
-                      <a:schemeClr val="tx1"/>
-                    </a:solidFill>
-                  </a:rPr>
-                  <a:t>= </a:t>
-                </a:r>
-                <a14:m>
-                  <m:oMath xmlns:m="http://schemas.openxmlformats.org/officeDocument/2006/math">
-                    <m:r>
-                      <a:rPr lang="en-US" sz="2000" i="1" dirty="0">
-                        <a:solidFill>
-                          <a:schemeClr val="tx1"/>
-                        </a:solidFill>
-                        <a:latin typeface="Cambria Math" panose="02040503050406030204" pitchFamily="18" charset="0"/>
-                      </a:rPr>
-                      <m:t>𝛱</m:t>
-                    </m:r>
-                    <m:d>
-                      <m:dPr>
-                        <m:ctrlPr>
-                          <a:rPr lang="en-US" sz="2000" i="1" dirty="0">
-                            <a:solidFill>
-                              <a:schemeClr val="tx1"/>
-                            </a:solidFill>
-                            <a:latin typeface="Cambria Math" panose="02040503050406030204" pitchFamily="18" charset="0"/>
-                          </a:rPr>
-                        </m:ctrlPr>
-                      </m:dPr>
-                      <m:e>
-                        <m:sSub>
-                          <m:sSubPr>
-                            <m:ctrlPr>
-                              <a:rPr lang="en-US" sz="2000" i="1" dirty="0">
-                                <a:solidFill>
-                                  <a:schemeClr val="tx1"/>
-                                </a:solidFill>
-                                <a:latin typeface="Cambria Math" panose="02040503050406030204" pitchFamily="18" charset="0"/>
-                              </a:rPr>
-                            </m:ctrlPr>
-                          </m:sSubPr>
-                          <m:e>
-                            <m:r>
-                              <a:rPr lang="en-US" sz="2000" i="1" dirty="0">
-                                <a:solidFill>
-                                  <a:schemeClr val="tx1"/>
-                                </a:solidFill>
-                                <a:latin typeface="Cambria Math" panose="02040503050406030204" pitchFamily="18" charset="0"/>
-                              </a:rPr>
-                              <m:t>𝐶</m:t>
-                            </m:r>
-                          </m:e>
-                          <m:sub>
-                            <m:r>
-                              <a:rPr lang="en-US" sz="2000" i="1" dirty="0">
-                                <a:solidFill>
-                                  <a:schemeClr val="tx1"/>
-                                </a:solidFill>
-                                <a:latin typeface="Cambria Math" panose="02040503050406030204" pitchFamily="18" charset="0"/>
-                              </a:rPr>
-                              <m:t>𝑃</m:t>
-                            </m:r>
-                          </m:sub>
-                        </m:sSub>
-                        <m:d>
-                          <m:dPr>
-                            <m:ctrlPr>
-                              <a:rPr lang="fr-FR" sz="2000" b="0" i="1" dirty="0" smtClean="0">
-                                <a:solidFill>
-                                  <a:schemeClr val="tx1"/>
-                                </a:solidFill>
-                                <a:latin typeface="Cambria Math" panose="02040503050406030204" pitchFamily="18" charset="0"/>
-                              </a:rPr>
-                            </m:ctrlPr>
-                          </m:dPr>
-                          <m:e>
-                            <m:r>
-                              <a:rPr lang="fr-FR" sz="2000" b="0" i="1" dirty="0" smtClean="0">
-                                <a:solidFill>
-                                  <a:schemeClr val="tx1"/>
-                                </a:solidFill>
-                                <a:latin typeface="Cambria Math" panose="02040503050406030204" pitchFamily="18" charset="0"/>
-                              </a:rPr>
-                              <m:t>0</m:t>
-                            </m:r>
-                          </m:e>
-                        </m:d>
-                      </m:e>
-                    </m:d>
-                  </m:oMath>
-                </a14:m>
-                <a:endParaRPr lang="en-US" sz="2000" dirty="0">
-                  <a:solidFill>
-                    <a:schemeClr val="tx1"/>
-                  </a:solidFill>
-                </a:endParaRPr>
-              </a:p>
-              <a:p>
-                <a:pPr marL="228600" indent="-228600">
-                  <a:spcAft>
-                    <a:spcPts val="1600"/>
-                  </a:spcAft>
-                  <a:buSzPct val="100000"/>
-                  <a:buChar char="•"/>
-                </a:pPr>
-                <a:r>
-                  <a:rPr lang="en-US" sz="2000" b="1" dirty="0" err="1">
-                    <a:solidFill>
-                      <a:srgbClr val="1B2430"/>
-                    </a:solidFill>
-                    <a:latin typeface="Calibri" pitchFamily="34" charset="0"/>
-                    <a:ea typeface="Calibri" pitchFamily="34" charset="-122"/>
-                    <a:cs typeface="Calibri" pitchFamily="34" charset="-120"/>
-                  </a:rPr>
-                  <a:t>Résultat</a:t>
-                </a:r>
-                <a:r>
-                  <a:rPr lang="en-US" sz="2000" dirty="0">
-                    <a:solidFill>
-                      <a:srgbClr val="1B2430"/>
-                    </a:solidFill>
-                    <a:latin typeface="Calibri" pitchFamily="34" charset="0"/>
-                    <a:ea typeface="Calibri" pitchFamily="34" charset="-122"/>
-                    <a:cs typeface="Calibri" pitchFamily="34" charset="-120"/>
-                  </a:rPr>
-                  <a:t> : la mesure « spatiale » se </a:t>
-                </a:r>
-                <a:r>
-                  <a:rPr lang="en-US" sz="2000" dirty="0" err="1">
-                    <a:solidFill>
-                      <a:srgbClr val="1B2430"/>
-                    </a:solidFill>
-                    <a:latin typeface="Calibri" pitchFamily="34" charset="0"/>
-                    <a:ea typeface="Calibri" pitchFamily="34" charset="-122"/>
-                    <a:cs typeface="Calibri" pitchFamily="34" charset="-120"/>
-                  </a:rPr>
-                  <a:t>réduit</a:t>
-                </a:r>
-                <a:r>
-                  <a:rPr lang="en-US" sz="2000" dirty="0">
-                    <a:solidFill>
-                      <a:srgbClr val="1B2430"/>
-                    </a:solidFill>
-                    <a:latin typeface="Calibri" pitchFamily="34" charset="0"/>
-                    <a:ea typeface="Calibri" pitchFamily="34" charset="-122"/>
-                    <a:cs typeface="Calibri" pitchFamily="34" charset="-120"/>
-                  </a:rPr>
-                  <a:t> à la mesure d'un site unique — toute </a:t>
-                </a:r>
-                <a:r>
-                  <a:rPr lang="en-US" sz="2000" dirty="0" err="1">
-                    <a:solidFill>
-                      <a:srgbClr val="1B2430"/>
-                    </a:solidFill>
-                    <a:latin typeface="Calibri" pitchFamily="34" charset="0"/>
-                    <a:ea typeface="Calibri" pitchFamily="34" charset="-122"/>
-                    <a:cs typeface="Calibri" pitchFamily="34" charset="-120"/>
-                  </a:rPr>
-                  <a:t>l'information</a:t>
-                </a:r>
-                <a:r>
-                  <a:rPr lang="en-US" sz="2000" dirty="0">
-                    <a:solidFill>
-                      <a:srgbClr val="1B2430"/>
-                    </a:solidFill>
-                    <a:latin typeface="Calibri" pitchFamily="34" charset="0"/>
-                    <a:ea typeface="Calibri" pitchFamily="34" charset="-122"/>
-                    <a:cs typeface="Calibri" pitchFamily="34" charset="-120"/>
-                  </a:rPr>
-                  <a:t> de </a:t>
-                </a:r>
-                <a:r>
-                  <a:rPr lang="en-US" sz="2000" dirty="0" err="1">
-                    <a:solidFill>
-                      <a:srgbClr val="1B2430"/>
-                    </a:solidFill>
-                    <a:latin typeface="Calibri" pitchFamily="34" charset="0"/>
-                    <a:ea typeface="Calibri" pitchFamily="34" charset="-122"/>
-                    <a:cs typeface="Calibri" pitchFamily="34" charset="-120"/>
-                  </a:rPr>
-                  <a:t>dépendance</a:t>
-                </a:r>
-                <a:r>
-                  <a:rPr lang="en-US" sz="2000" dirty="0">
-                    <a:solidFill>
-                      <a:srgbClr val="1B2430"/>
-                    </a:solidFill>
-                    <a:latin typeface="Calibri" pitchFamily="34" charset="0"/>
-                    <a:ea typeface="Calibri" pitchFamily="34" charset="-122"/>
-                    <a:cs typeface="Calibri" pitchFamily="34" charset="-120"/>
-                  </a:rPr>
-                  <a:t> spatiale </a:t>
-                </a:r>
-                <a:r>
-                  <a:rPr lang="en-US" sz="2000" dirty="0" err="1">
-                    <a:solidFill>
-                      <a:srgbClr val="1B2430"/>
-                    </a:solidFill>
-                    <a:latin typeface="Calibri" pitchFamily="34" charset="0"/>
-                    <a:ea typeface="Calibri" pitchFamily="34" charset="-122"/>
-                    <a:cs typeface="Calibri" pitchFamily="34" charset="-120"/>
-                  </a:rPr>
-                  <a:t>disparaît</a:t>
-                </a:r>
-                <a:r>
-                  <a:rPr lang="en-US" sz="2000" dirty="0">
-                    <a:solidFill>
-                      <a:srgbClr val="1B2430"/>
-                    </a:solidFill>
-                    <a:latin typeface="Calibri" pitchFamily="34" charset="0"/>
-                    <a:ea typeface="Calibri" pitchFamily="34" charset="-122"/>
-                    <a:cs typeface="Calibri" pitchFamily="34" charset="-120"/>
-                  </a:rPr>
-                  <a:t>.</a:t>
-                </a:r>
-                <a:endParaRPr lang="en-US" sz="2000" dirty="0"/>
-              </a:p>
-            </p:txBody>
-          </p:sp>
-        </mc:Choice>
-        <mc:Fallback xmlns="">
-          <p:sp>
-            <p:nvSpPr>
-              <p:cNvPr id="7" name="Rectangle 6">
-                <a:extLst>
-                  <a:ext uri="{FF2B5EF4-FFF2-40B4-BE49-F238E27FC236}">
-                    <a16:creationId xmlns:a16="http://schemas.microsoft.com/office/drawing/2014/main" id="{5A8E4FFE-8178-B87D-53A2-91AA17AE7CC2}"/>
-                  </a:ext>
-                </a:extLst>
-              </p:cNvPr>
-              <p:cNvSpPr>
-                <a:spLocks noRot="1" noChangeAspect="1" noMove="1" noResize="1" noEditPoints="1" noAdjustHandles="1" noChangeArrowheads="1" noChangeShapeType="1" noTextEdit="1"/>
-              </p:cNvSpPr>
-              <p:nvPr/>
-            </p:nvSpPr>
-            <p:spPr>
-              <a:xfrm>
-                <a:off x="620485" y="1665513"/>
-                <a:ext cx="10308771" cy="2939143"/>
-              </a:xfrm>
-              <a:prstGeom prst="rect">
-                <a:avLst/>
-              </a:prstGeom>
-              <a:blipFill>
-                <a:blip r:embed="rId2"/>
-                <a:stretch>
-                  <a:fillRect l="-590" t="-619" r="-531" b="-2680"/>
-                </a:stretch>
-              </a:blipFill>
-            </p:spPr>
-            <p:txBody>
-              <a:bodyPr/>
-              <a:lstStyle/>
-              <a:p>
-                <a:r>
-                  <a:rPr lang="fr-FR">
-                    <a:noFill/>
-                  </a:rPr>
-                  <a:t> </a:t>
-                </a:r>
-              </a:p>
-            </p:txBody>
-          </p:sp>
-        </mc:Fallback>
-      </mc:AlternateContent>
-      <p:sp>
-        <p:nvSpPr>
-          <p:cNvPr id="8" name="Rectangle : coins arrondis 7">
-            <a:extLst>
-              <a:ext uri="{FF2B5EF4-FFF2-40B4-BE49-F238E27FC236}">
-                <a16:creationId xmlns:a16="http://schemas.microsoft.com/office/drawing/2014/main" id="{A824B4D3-A8C0-EAB2-2810-BB09BA22E0E3}"/>
-              </a:ext>
-            </a:extLst>
-          </p:cNvPr>
-          <p:cNvSpPr/>
-          <p:nvPr/>
-        </p:nvSpPr>
-        <p:spPr>
-          <a:xfrm>
-            <a:off x="620485" y="1274668"/>
-            <a:ext cx="10308771" cy="380480"/>
-          </a:xfrm>
-          <a:prstGeom prst="roundRect">
-            <a:avLst/>
-          </a:prstGeom>
-        </p:spPr>
-        <p:style>
-          <a:lnRef idx="2">
-            <a:schemeClr val="accent1">
-              <a:shade val="15000"/>
-            </a:schemeClr>
-          </a:lnRef>
-          <a:fillRef idx="1">
-            <a:schemeClr val="accent1"/>
-          </a:fillRef>
-          <a:effectRef idx="0">
-            <a:schemeClr val="accent1"/>
-          </a:effectRef>
-          <a:fontRef idx="minor">
-            <a:schemeClr val="lt1"/>
-          </a:fontRef>
-        </p:style>
-        <p:txBody>
-          <a:bodyPr rtlCol="0" anchor="ctr"/>
-          <a:lstStyle/>
-          <a:p>
-            <a:r>
-              <a:rPr lang="fr-FR" sz="2400" dirty="0"/>
-              <a:t>Approche naïve</a:t>
-            </a:r>
-          </a:p>
-        </p:txBody>
-      </p:sp>
-      <p:sp>
-        <p:nvSpPr>
-          <p:cNvPr id="15" name="Rectangle : coins arrondis 14">
-            <a:extLst>
-              <a:ext uri="{FF2B5EF4-FFF2-40B4-BE49-F238E27FC236}">
-                <a16:creationId xmlns:a16="http://schemas.microsoft.com/office/drawing/2014/main" id="{73C4B7B1-B0C0-334C-FA24-768894C2B8FA}"/>
+                <a16:creationId xmlns:a16="http://schemas.microsoft.com/office/drawing/2014/main" id="{BC12E178-D70E-4B83-0C6B-27F99052A1AB}"/>
               </a:ext>
             </a:extLst>
           </p:cNvPr>
@@ -5152,7 +3794,7 @@
           <p:cNvPr id="17" name="Rectangle 16">
             <a:extLst>
               <a:ext uri="{FF2B5EF4-FFF2-40B4-BE49-F238E27FC236}">
-                <a16:creationId xmlns:a16="http://schemas.microsoft.com/office/drawing/2014/main" id="{25535385-4EE7-1721-B96B-00A58CB439A1}"/>
+                <a16:creationId xmlns:a16="http://schemas.microsoft.com/office/drawing/2014/main" id="{7BF7FDBC-0CD8-DAF3-9223-A2B2214CCF1E}"/>
               </a:ext>
             </a:extLst>
           </p:cNvPr>
@@ -5197,105 +3839,283 @@
               </a:lnSpc>
             </a:pPr>
             <a:r>
+              <a:rPr lang="en-US" sz="2000" dirty="0">
+                <a:solidFill>
+                  <a:schemeClr val="tx1"/>
+                </a:solidFill>
+              </a:rPr>
+              <a:t>Si le processus est </a:t>
+            </a:r>
+            <a:r>
               <a:rPr lang="en-US" sz="2000" dirty="0" err="1">
                 <a:solidFill>
                   <a:schemeClr val="tx1"/>
                 </a:solidFill>
-                <a:latin typeface="Calibri" pitchFamily="34" charset="0"/>
-                <a:ea typeface="Calibri" pitchFamily="34" charset="-122"/>
-                <a:cs typeface="Calibri" pitchFamily="34" charset="-120"/>
-              </a:rPr>
-              <a:t>Agréger</a:t>
+              </a:rPr>
+              <a:t>isotrope</a:t>
             </a:r>
             <a:r>
               <a:rPr lang="en-US" sz="2000" dirty="0">
                 <a:solidFill>
                   <a:schemeClr val="tx1"/>
                 </a:solidFill>
-                <a:latin typeface="Calibri" pitchFamily="34" charset="0"/>
-                <a:ea typeface="Calibri" pitchFamily="34" charset="-122"/>
-                <a:cs typeface="Calibri" pitchFamily="34" charset="-120"/>
+              </a:rPr>
+              <a:t> ,</a:t>
+            </a:r>
+            <a:r>
+              <a:rPr lang="el-GR" sz="2000" dirty="0">
+                <a:solidFill>
+                  <a:schemeClr val="tx2">
+                    <a:lumMod val="75000"/>
+                  </a:schemeClr>
+                </a:solidFill>
+              </a:rPr>
+              <a:t>Θ</a:t>
+            </a:r>
+            <a:r>
+              <a:rPr lang="fr-FR" sz="2000" dirty="0">
+                <a:solidFill>
+                  <a:schemeClr val="tx2">
+                    <a:lumMod val="75000"/>
+                  </a:schemeClr>
+                </a:solidFill>
               </a:rPr>
               <a:t> </a:t>
             </a:r>
             <a:r>
+              <a:rPr lang="en-US" sz="2000" dirty="0">
+                <a:solidFill>
+                  <a:schemeClr val="tx1"/>
+                </a:solidFill>
+              </a:rPr>
+              <a:t>depend </a:t>
+            </a:r>
+            <a:r>
               <a:rPr lang="en-US" sz="2000" dirty="0" err="1">
                 <a:solidFill>
                   <a:schemeClr val="tx1"/>
                 </a:solidFill>
-                <a:latin typeface="Calibri" pitchFamily="34" charset="0"/>
-                <a:ea typeface="Calibri" pitchFamily="34" charset="-122"/>
-                <a:cs typeface="Calibri" pitchFamily="34" charset="-120"/>
-              </a:rPr>
-              <a:t>d’abord</a:t>
+              </a:rPr>
+              <a:t>seulement</a:t>
             </a:r>
             <a:r>
               <a:rPr lang="en-US" sz="2000" dirty="0">
                 <a:solidFill>
                   <a:schemeClr val="tx1"/>
                 </a:solidFill>
-                <a:latin typeface="Calibri" pitchFamily="34" charset="0"/>
-                <a:ea typeface="Calibri" pitchFamily="34" charset="-122"/>
-                <a:cs typeface="Calibri" pitchFamily="34" charset="-120"/>
-              </a:rPr>
-              <a:t> – </a:t>
-            </a:r>
-            <a:r>
-              <a:rPr lang="en-US" sz="2000" dirty="0" err="1">
-                <a:solidFill>
-                  <a:schemeClr val="tx1"/>
-                </a:solidFill>
-                <a:latin typeface="Calibri" pitchFamily="34" charset="0"/>
-                <a:ea typeface="Calibri" pitchFamily="34" charset="-122"/>
-                <a:cs typeface="Calibri" pitchFamily="34" charset="-120"/>
-              </a:rPr>
-              <a:t>puis</a:t>
-            </a:r>
-            <a:r>
-              <a:rPr lang="en-US" sz="2000" dirty="0">
-                <a:solidFill>
-                  <a:schemeClr val="tx1"/>
-                </a:solidFill>
-                <a:latin typeface="Calibri" pitchFamily="34" charset="0"/>
-                <a:ea typeface="Calibri" pitchFamily="34" charset="-122"/>
-                <a:cs typeface="Calibri" pitchFamily="34" charset="-120"/>
-              </a:rPr>
-              <a:t> </a:t>
-            </a:r>
-            <a:r>
-              <a:rPr lang="en-US" sz="2000" dirty="0" err="1">
-                <a:solidFill>
-                  <a:schemeClr val="tx1"/>
-                </a:solidFill>
-                <a:latin typeface="Calibri" pitchFamily="34" charset="0"/>
-                <a:ea typeface="Calibri" pitchFamily="34" charset="-122"/>
-                <a:cs typeface="Calibri" pitchFamily="34" charset="-120"/>
-              </a:rPr>
-              <a:t>mesurer</a:t>
-            </a:r>
-            <a:r>
-              <a:rPr lang="en-US" sz="2000" dirty="0">
-                <a:solidFill>
-                  <a:schemeClr val="tx1"/>
-                </a:solidFill>
-                <a:latin typeface="Calibri" pitchFamily="34" charset="0"/>
-                <a:ea typeface="Calibri" pitchFamily="34" charset="-122"/>
-                <a:cs typeface="Calibri" pitchFamily="34" charset="-120"/>
-              </a:rPr>
-              <a:t> le risque.</a:t>
-            </a:r>
-            <a:endParaRPr lang="en-US" sz="2000" dirty="0">
+              </a:rPr>
+              <a:t> de la distance  h=||x1-x2||</a:t>
+            </a:r>
+          </a:p>
+        </p:txBody>
+      </p:sp>
+      <p:pic>
+        <p:nvPicPr>
+          <p:cNvPr id="4" name="Image 3">
+            <a:extLst>
+              <a:ext uri="{FF2B5EF4-FFF2-40B4-BE49-F238E27FC236}">
+                <a16:creationId xmlns:a16="http://schemas.microsoft.com/office/drawing/2014/main" id="{C8942208-A6BE-1CAB-30A0-4C91F4F55D28}"/>
+              </a:ext>
+            </a:extLst>
+          </p:cNvPr>
+          <p:cNvPicPr>
+            <a:picLocks noChangeAspect="1"/>
+          </p:cNvPicPr>
+          <p:nvPr/>
+        </p:nvPicPr>
+        <p:blipFill>
+          <a:blip r:embed="rId2">
+            <a:extLst>
+              <a:ext uri="{28A0092B-C50C-407E-A947-70E740481C1C}">
+                <a14:useLocalDpi xmlns:a14="http://schemas.microsoft.com/office/drawing/2010/main" val="0"/>
+              </a:ext>
+            </a:extLst>
+          </a:blip>
+          <a:stretch>
+            <a:fillRect/>
+          </a:stretch>
+        </p:blipFill>
+        <p:spPr>
+          <a:xfrm>
+            <a:off x="2948027" y="2564326"/>
+            <a:ext cx="4054191" cy="707922"/>
+          </a:xfrm>
+          <a:prstGeom prst="rect">
+            <a:avLst/>
+          </a:prstGeom>
+        </p:spPr>
+      </p:pic>
+      <p:sp>
+        <p:nvSpPr>
+          <p:cNvPr id="6" name="TextBox 4">
+            <a:extLst>
+              <a:ext uri="{FF2B5EF4-FFF2-40B4-BE49-F238E27FC236}">
+                <a16:creationId xmlns:a16="http://schemas.microsoft.com/office/drawing/2014/main" id="{70A60DCE-4656-B8FB-D038-FAD60571034B}"/>
+              </a:ext>
+            </a:extLst>
+          </p:cNvPr>
+          <p:cNvSpPr txBox="1"/>
+          <p:nvPr/>
+        </p:nvSpPr>
+        <p:spPr>
+          <a:xfrm>
+            <a:off x="51464" y="3127262"/>
+            <a:ext cx="2926080" cy="830997"/>
+          </a:xfrm>
+          <a:prstGeom prst="rect">
+            <a:avLst/>
+          </a:prstGeom>
+          <a:noFill/>
+        </p:spPr>
+        <p:txBody>
+          <a:bodyPr wrap="square" anchor="ctr">
+            <a:spAutoFit/>
+          </a:bodyPr>
+          <a:lstStyle/>
+          <a:p>
+            <a:pPr algn="ctr">
+              <a:defRPr sz="2400" b="1">
+                <a:solidFill>
+                  <a:srgbClr val="EA580C"/>
+                </a:solidFill>
+              </a:defRPr>
+            </a:pPr>
+            <a:r>
+              <a:rPr dirty="0">
+                <a:solidFill>
+                  <a:schemeClr val="tx2">
+                    <a:lumMod val="75000"/>
+                  </a:schemeClr>
+                </a:solidFill>
+              </a:rPr>
+              <a:t>Θ = 1</a:t>
+            </a:r>
+            <a:endParaRPr lang="fr-FR" dirty="0">
               <a:solidFill>
-                <a:schemeClr val="tx1"/>
+                <a:schemeClr val="tx2">
+                  <a:lumMod val="75000"/>
+                </a:schemeClr>
               </a:solidFill>
             </a:endParaRPr>
+          </a:p>
+          <a:p>
+            <a:pPr algn="ctr">
+              <a:defRPr sz="2400" b="1">
+                <a:solidFill>
+                  <a:srgbClr val="EA580C"/>
+                </a:solidFill>
+              </a:defRPr>
+            </a:pPr>
+            <a:endParaRPr dirty="0">
+              <a:solidFill>
+                <a:schemeClr val="tx2">
+                  <a:lumMod val="75000"/>
+                </a:schemeClr>
+              </a:solidFill>
+            </a:endParaRPr>
+          </a:p>
+        </p:txBody>
+      </p:sp>
+      <p:sp>
+        <p:nvSpPr>
+          <p:cNvPr id="10" name="TextBox 5">
+            <a:extLst>
+              <a:ext uri="{FF2B5EF4-FFF2-40B4-BE49-F238E27FC236}">
+                <a16:creationId xmlns:a16="http://schemas.microsoft.com/office/drawing/2014/main" id="{370B8396-81B7-FA11-7218-3434A2956428}"/>
+              </a:ext>
+            </a:extLst>
+          </p:cNvPr>
+          <p:cNvSpPr txBox="1"/>
+          <p:nvPr/>
+        </p:nvSpPr>
+        <p:spPr>
+          <a:xfrm>
+            <a:off x="3510568" y="3192808"/>
+            <a:ext cx="2926080" cy="461665"/>
+          </a:xfrm>
+          <a:prstGeom prst="rect">
+            <a:avLst/>
+          </a:prstGeom>
+          <a:noFill/>
+        </p:spPr>
+        <p:txBody>
+          <a:bodyPr wrap="square" anchor="ctr">
+            <a:spAutoFit/>
+          </a:bodyPr>
+          <a:lstStyle/>
+          <a:p>
+            <a:pPr algn="ctr">
+              <a:defRPr sz="2400" b="1">
+                <a:solidFill>
+                  <a:srgbClr val="2563EB"/>
+                </a:solidFill>
+              </a:defRPr>
+            </a:pPr>
+            <a:r>
+              <a:rPr dirty="0">
+                <a:solidFill>
+                  <a:schemeClr val="tx2">
+                    <a:lumMod val="75000"/>
+                  </a:schemeClr>
+                </a:solidFill>
+              </a:rPr>
+              <a:t>1 &lt; Θ &lt; 2</a:t>
+            </a:r>
+          </a:p>
+        </p:txBody>
+      </p:sp>
+      <p:sp>
+        <p:nvSpPr>
+          <p:cNvPr id="12" name="TextBox 6">
+            <a:extLst>
+              <a:ext uri="{FF2B5EF4-FFF2-40B4-BE49-F238E27FC236}">
+                <a16:creationId xmlns:a16="http://schemas.microsoft.com/office/drawing/2014/main" id="{B3AD0C5B-5F73-B594-CED0-6327404C6A0B}"/>
+              </a:ext>
+            </a:extLst>
+          </p:cNvPr>
+          <p:cNvSpPr txBox="1"/>
+          <p:nvPr/>
+        </p:nvSpPr>
+        <p:spPr>
+          <a:xfrm>
+            <a:off x="7502697" y="3192808"/>
+            <a:ext cx="2926080" cy="461665"/>
+          </a:xfrm>
+          <a:prstGeom prst="rect">
+            <a:avLst/>
+          </a:prstGeom>
+          <a:noFill/>
+        </p:spPr>
+        <p:txBody>
+          <a:bodyPr wrap="square" anchor="ctr">
+            <a:spAutoFit/>
+          </a:bodyPr>
+          <a:lstStyle/>
+          <a:p>
+            <a:pPr algn="ctr">
+              <a:defRPr sz="2400" b="1">
+                <a:solidFill>
+                  <a:srgbClr val="16A34A"/>
+                </a:solidFill>
+              </a:defRPr>
+            </a:pPr>
+            <a:r>
+              <a:rPr dirty="0">
+                <a:solidFill>
+                  <a:schemeClr val="tx2">
+                    <a:lumMod val="75000"/>
+                  </a:schemeClr>
+                </a:solidFill>
+              </a:rPr>
+              <a:t>Θ = 2</a:t>
+            </a:r>
           </a:p>
         </p:txBody>
       </p:sp>
     </p:spTree>
     <p:extLst>
       <p:ext uri="{BB962C8B-B14F-4D97-AF65-F5344CB8AC3E}">
-        <p14:creationId xmlns:p14="http://schemas.microsoft.com/office/powerpoint/2010/main" val="2024187343"/>
+        <p14:creationId xmlns:p14="http://schemas.microsoft.com/office/powerpoint/2010/main" val="1859687788"/>
       </p:ext>
     </p:extLst>
   </p:cSld>
@@ -5305,7 +4125,7 @@
 </p:sld>
 </file>
 
-<file path=ppt/slides/slide4.xml><?xml version="1.0" encoding="utf-8"?>
+<file path=ppt/slides/slide2.xml><?xml version="1.0" encoding="utf-8"?>
 <p:sld xmlns:a="http://schemas.openxmlformats.org/drawingml/2006/main" xmlns:r="http://schemas.openxmlformats.org/officeDocument/2006/relationships" xmlns:p="http://schemas.openxmlformats.org/presentationml/2006/main">
   <p:cSld>
     <p:spTree>
@@ -5313,7 +4133,7 @@
         <p:cNvPr id="1" name="">
           <a:extLst>
             <a:ext uri="{FF2B5EF4-FFF2-40B4-BE49-F238E27FC236}">
-              <a16:creationId xmlns:a16="http://schemas.microsoft.com/office/drawing/2014/main" id="{F7BFA7D6-6AF8-BA04-8D8D-8A03CFB0DD41}"/>
+              <a16:creationId xmlns:a16="http://schemas.microsoft.com/office/drawing/2014/main" id="{67779B07-953B-2B10-7BF4-378F78333DF9}"/>
             </a:ext>
           </a:extLst>
         </p:cNvPr>
@@ -5333,7 +4153,7 @@
           <p:cNvPr id="3" name="Rectangle 2">
             <a:extLst>
               <a:ext uri="{FF2B5EF4-FFF2-40B4-BE49-F238E27FC236}">
-                <a16:creationId xmlns:a16="http://schemas.microsoft.com/office/drawing/2014/main" id="{60A07869-8A3B-E19E-E10E-9A9C619038C3}"/>
+                <a16:creationId xmlns:a16="http://schemas.microsoft.com/office/drawing/2014/main" id="{AC61F060-6595-0E78-927C-C78299D53263}"/>
               </a:ext>
             </a:extLst>
           </p:cNvPr>
@@ -5394,7 +4214,7 @@
           <p:cNvPr id="7" name="Rectangle 6">
             <a:extLst>
               <a:ext uri="{FF2B5EF4-FFF2-40B4-BE49-F238E27FC236}">
-                <a16:creationId xmlns:a16="http://schemas.microsoft.com/office/drawing/2014/main" id="{7B0DABE4-926D-3C75-9EDA-C41FEFD6F519}"/>
+                <a16:creationId xmlns:a16="http://schemas.microsoft.com/office/drawing/2014/main" id="{0FBCF152-08CE-45E2-B805-A45F593323B2}"/>
               </a:ext>
             </a:extLst>
           </p:cNvPr>
@@ -5403,8 +4223,8 @@
         </p:nvSpPr>
         <p:spPr>
           <a:xfrm>
-            <a:off x="620485" y="1584132"/>
-            <a:ext cx="10308771" cy="3205579"/>
+            <a:off x="620485" y="1665513"/>
+            <a:ext cx="10308771" cy="2939143"/>
           </a:xfrm>
           <a:prstGeom prst="rect">
             <a:avLst/>
@@ -5456,94 +4276,14 @@
               </a:spcAft>
               <a:buSzPct val="100000"/>
             </a:pPr>
-            <a:r>
-              <a:rPr lang="en-US" sz="2400" dirty="0">
-                <a:solidFill>
-                  <a:srgbClr val="1B2430"/>
-                </a:solidFill>
-                <a:latin typeface="Calibri" pitchFamily="34" charset="0"/>
-                <a:ea typeface="Calibri" pitchFamily="34" charset="-122"/>
-                <a:cs typeface="Calibri" pitchFamily="34" charset="-120"/>
-              </a:rPr>
-              <a:t>Deux </a:t>
-            </a:r>
-            <a:r>
-              <a:rPr lang="en-US" sz="2400" dirty="0" err="1">
-                <a:solidFill>
-                  <a:srgbClr val="1B2430"/>
-                </a:solidFill>
-                <a:latin typeface="Calibri" pitchFamily="34" charset="0"/>
-                <a:ea typeface="Calibri" pitchFamily="34" charset="-122"/>
-                <a:cs typeface="Calibri" pitchFamily="34" charset="-120"/>
-              </a:rPr>
-              <a:t>localisations</a:t>
-            </a:r>
-            <a:r>
-              <a:rPr lang="en-US" sz="2400" dirty="0">
-                <a:solidFill>
-                  <a:srgbClr val="1B2430"/>
-                </a:solidFill>
-                <a:latin typeface="Calibri" pitchFamily="34" charset="0"/>
-                <a:ea typeface="Calibri" pitchFamily="34" charset="-122"/>
-                <a:cs typeface="Calibri" pitchFamily="34" charset="-120"/>
-              </a:rPr>
-              <a:t> </a:t>
-            </a:r>
-            <a:r>
-              <a:rPr lang="en-US" sz="2400" b="1" dirty="0">
-                <a:solidFill>
-                  <a:srgbClr val="1B2430"/>
-                </a:solidFill>
-                <a:latin typeface="Calibri" pitchFamily="34" charset="0"/>
-                <a:ea typeface="Calibri" pitchFamily="34" charset="-122"/>
-                <a:cs typeface="Calibri" pitchFamily="34" charset="-120"/>
-              </a:rPr>
-              <a:t>x1</a:t>
-            </a:r>
-            <a:r>
-              <a:rPr lang="en-US" sz="2400" dirty="0">
-                <a:solidFill>
-                  <a:srgbClr val="1B2430"/>
-                </a:solidFill>
-                <a:latin typeface="Calibri" pitchFamily="34" charset="0"/>
-                <a:ea typeface="Calibri" pitchFamily="34" charset="-122"/>
-                <a:cs typeface="Calibri" pitchFamily="34" charset="-120"/>
-              </a:rPr>
-              <a:t> et </a:t>
-            </a:r>
-            <a:r>
-              <a:rPr lang="en-US" sz="2400" b="1" dirty="0">
-                <a:solidFill>
-                  <a:srgbClr val="1B2430"/>
-                </a:solidFill>
-                <a:latin typeface="Calibri" pitchFamily="34" charset="0"/>
-                <a:ea typeface="Calibri" pitchFamily="34" charset="-122"/>
-                <a:cs typeface="Calibri" pitchFamily="34" charset="-120"/>
-              </a:rPr>
-              <a:t>x2</a:t>
-            </a:r>
-            <a:r>
-              <a:rPr lang="en-US" sz="2400" dirty="0">
-                <a:solidFill>
-                  <a:srgbClr val="1B2430"/>
-                </a:solidFill>
-                <a:latin typeface="Calibri" pitchFamily="34" charset="0"/>
-                <a:ea typeface="Calibri" pitchFamily="34" charset="-122"/>
-                <a:cs typeface="Calibri" pitchFamily="34" charset="-120"/>
-              </a:rPr>
-              <a:t> dans un processus max-stable simple </a:t>
-            </a:r>
-            <a:r>
-              <a:rPr lang="en-US" sz="2000" dirty="0">
-                <a:solidFill>
-                  <a:srgbClr val="1B2430"/>
-                </a:solidFill>
-                <a:latin typeface="Calibri" pitchFamily="34" charset="0"/>
-                <a:ea typeface="Calibri" pitchFamily="34" charset="-122"/>
-                <a:cs typeface="Calibri" pitchFamily="34" charset="-120"/>
-              </a:rPr>
-              <a:t>.</a:t>
-            </a:r>
+            <a:endParaRPr lang="en-US" sz="2000" dirty="0">
+              <a:solidFill>
+                <a:srgbClr val="1B2430"/>
+              </a:solidFill>
+              <a:latin typeface="Calibri" pitchFamily="34" charset="0"/>
+              <a:ea typeface="Calibri" pitchFamily="34" charset="-122"/>
+              <a:cs typeface="Calibri" pitchFamily="34" charset="-120"/>
+            </a:endParaRPr>
           </a:p>
           <a:p>
             <a:pPr marL="228600" indent="-228600">
@@ -5556,126 +4296,6 @@
             <a:endParaRPr lang="en-US" sz="2000" dirty="0"/>
           </a:p>
           <a:p>
-            <a:pPr>
-              <a:spcAft>
-                <a:spcPts val="1600"/>
-              </a:spcAft>
-              <a:buSzPct val="100000"/>
-            </a:pPr>
-            <a:endParaRPr lang="en-US" sz="2000" b="1" dirty="0">
-              <a:solidFill>
-                <a:srgbClr val="1B2430"/>
-              </a:solidFill>
-              <a:latin typeface="Calibri" pitchFamily="34" charset="0"/>
-              <a:ea typeface="Calibri" pitchFamily="34" charset="-122"/>
-              <a:cs typeface="Calibri" pitchFamily="34" charset="-120"/>
-            </a:endParaRPr>
-          </a:p>
-          <a:p>
-            <a:pPr>
-              <a:spcAft>
-                <a:spcPts val="1600"/>
-              </a:spcAft>
-              <a:buSzPct val="100000"/>
-            </a:pPr>
-            <a:r>
-              <a:rPr lang="en-US" sz="1600" b="1" dirty="0">
-                <a:solidFill>
-                  <a:srgbClr val="1B2430"/>
-                </a:solidFill>
-                <a:latin typeface="Calibri" pitchFamily="34" charset="0"/>
-                <a:ea typeface="Calibri" pitchFamily="34" charset="-122"/>
-                <a:cs typeface="Calibri" pitchFamily="34" charset="-120"/>
-              </a:rPr>
-              <a:t>Dependance parfait                               </a:t>
-            </a:r>
-            <a:r>
-              <a:rPr lang="en-US" sz="1600" b="1" dirty="0" err="1">
-                <a:solidFill>
-                  <a:srgbClr val="1B2430"/>
-                </a:solidFill>
-                <a:latin typeface="Calibri" pitchFamily="34" charset="0"/>
-                <a:ea typeface="Calibri" pitchFamily="34" charset="-122"/>
-                <a:cs typeface="Calibri" pitchFamily="34" charset="-120"/>
-              </a:rPr>
-              <a:t>Dépendance</a:t>
-            </a:r>
-            <a:r>
-              <a:rPr lang="en-US" sz="1600" b="1" dirty="0">
-                <a:solidFill>
-                  <a:srgbClr val="1B2430"/>
-                </a:solidFill>
-                <a:latin typeface="Calibri" pitchFamily="34" charset="0"/>
-                <a:ea typeface="Calibri" pitchFamily="34" charset="-122"/>
-                <a:cs typeface="Calibri" pitchFamily="34" charset="-120"/>
-              </a:rPr>
-              <a:t> </a:t>
-            </a:r>
-            <a:r>
-              <a:rPr lang="en-US" sz="1600" b="1" dirty="0" err="1">
-                <a:solidFill>
-                  <a:srgbClr val="1B2430"/>
-                </a:solidFill>
-                <a:latin typeface="Calibri" pitchFamily="34" charset="0"/>
-                <a:ea typeface="Calibri" pitchFamily="34" charset="-122"/>
-                <a:cs typeface="Calibri" pitchFamily="34" charset="-120"/>
-              </a:rPr>
-              <a:t>intermédiare</a:t>
-            </a:r>
-            <a:r>
-              <a:rPr lang="en-US" sz="1600" b="1" dirty="0">
-                <a:solidFill>
-                  <a:srgbClr val="1B2430"/>
-                </a:solidFill>
-                <a:latin typeface="Calibri" pitchFamily="34" charset="0"/>
-                <a:ea typeface="Calibri" pitchFamily="34" charset="-122"/>
-                <a:cs typeface="Calibri" pitchFamily="34" charset="-120"/>
-              </a:rPr>
-              <a:t>                                                   </a:t>
-            </a:r>
-            <a:r>
-              <a:rPr lang="en-US" sz="1600" b="1" dirty="0" err="1">
-                <a:solidFill>
-                  <a:srgbClr val="1B2430"/>
-                </a:solidFill>
-                <a:latin typeface="Calibri" pitchFamily="34" charset="0"/>
-                <a:ea typeface="Calibri" pitchFamily="34" charset="-122"/>
-                <a:cs typeface="Calibri" pitchFamily="34" charset="-120"/>
-              </a:rPr>
-              <a:t>Indépendance</a:t>
-            </a:r>
-            <a:r>
-              <a:rPr lang="en-US" sz="1600" b="1" dirty="0">
-                <a:solidFill>
-                  <a:srgbClr val="1B2430"/>
-                </a:solidFill>
-                <a:latin typeface="Calibri" pitchFamily="34" charset="0"/>
-                <a:ea typeface="Calibri" pitchFamily="34" charset="-122"/>
-                <a:cs typeface="Calibri" pitchFamily="34" charset="-120"/>
-              </a:rPr>
-              <a:t> des extreme</a:t>
-            </a:r>
-          </a:p>
-          <a:p>
-            <a:pPr>
-              <a:spcAft>
-                <a:spcPts val="1600"/>
-              </a:spcAft>
-              <a:buSzPct val="100000"/>
-            </a:pPr>
-            <a:r>
-              <a:rPr lang="en-US" sz="1600" b="1" dirty="0">
-                <a:solidFill>
-                  <a:srgbClr val="1B2430"/>
-                </a:solidFill>
-                <a:latin typeface="Calibri" pitchFamily="34" charset="0"/>
-                <a:ea typeface="Calibri" pitchFamily="34" charset="-122"/>
-                <a:cs typeface="Calibri" pitchFamily="34" charset="-120"/>
-              </a:rPr>
-              <a:t>des extremes</a:t>
-            </a:r>
-          </a:p>
-          <a:p>
             <a:pPr marL="228600" indent="-228600">
               <a:spcAft>
                 <a:spcPts val="1600"/>
@@ -5692,7 +4312,7 @@
           <p:cNvPr id="8" name="Rectangle : coins arrondis 7">
             <a:extLst>
               <a:ext uri="{FF2B5EF4-FFF2-40B4-BE49-F238E27FC236}">
-                <a16:creationId xmlns:a16="http://schemas.microsoft.com/office/drawing/2014/main" id="{8A3AAD72-73F4-AD71-831D-645A4A6418F8}"/>
+                <a16:creationId xmlns:a16="http://schemas.microsoft.com/office/drawing/2014/main" id="{3438E18B-DCBB-13F0-AFDC-09CF7A0771A6}"/>
               </a:ext>
             </a:extLst>
           </p:cNvPr>
@@ -5729,8 +4349,44 @@
           <a:lstStyle/>
           <a:p>
             <a:r>
-              <a:rPr lang="fr-FR" sz="2400" dirty="0"/>
-              <a:t>Définition </a:t>
+              <a:rPr lang="fr-FR" sz="2400" dirty="0">
+                <a:solidFill>
+                  <a:schemeClr val="bg1"/>
+                </a:solidFill>
+              </a:rPr>
+              <a:t>Pourquoi </a:t>
+            </a:r>
+            <a:r>
+              <a:rPr lang="el-GR" sz="2400" dirty="0">
+                <a:solidFill>
+                  <a:schemeClr val="bg1"/>
+                </a:solidFill>
+              </a:rPr>
+              <a:t>Θ</a:t>
+            </a:r>
+            <a:r>
+              <a:rPr lang="fr-FR" sz="2400" dirty="0">
+                <a:solidFill>
+                  <a:schemeClr val="bg1"/>
+                </a:solidFill>
+              </a:rPr>
+              <a:t> est important pour la </a:t>
+            </a:r>
+            <a:r>
+              <a:rPr lang="fr-FR" sz="2400" dirty="0" err="1">
+                <a:solidFill>
+                  <a:schemeClr val="bg1"/>
+                </a:solidFill>
+              </a:rPr>
+              <a:t>diversifiaction</a:t>
+            </a:r>
+            <a:r>
+              <a:rPr lang="fr-FR" sz="2400" dirty="0">
+                <a:solidFill>
+                  <a:schemeClr val="bg1"/>
+                </a:solidFill>
+              </a:rPr>
+              <a:t> spatiale </a:t>
             </a:r>
           </a:p>
         </p:txBody>
@@ -5740,7 +4396,7 @@
           <p:cNvPr id="15" name="Rectangle : coins arrondis 14">
             <a:extLst>
               <a:ext uri="{FF2B5EF4-FFF2-40B4-BE49-F238E27FC236}">
-                <a16:creationId xmlns:a16="http://schemas.microsoft.com/office/drawing/2014/main" id="{BC12E178-D70E-4B83-0C6B-27F99052A1AB}"/>
+                <a16:creationId xmlns:a16="http://schemas.microsoft.com/office/drawing/2014/main" id="{0E3EE252-4B34-CA09-4386-F49CDEF8F74E}"/>
               </a:ext>
             </a:extLst>
           </p:cNvPr>
@@ -5778,7 +4434,7 @@
           <a:p>
             <a:r>
               <a:rPr lang="fr-FR" sz="2400" dirty="0"/>
-              <a:t>Conséquence</a:t>
+              <a:t>Interprétation actuarielle</a:t>
             </a:r>
           </a:p>
         </p:txBody>
@@ -5788,7 +4444,7 @@
           <p:cNvPr id="17" name="Rectangle 16">
             <a:extLst>
               <a:ext uri="{FF2B5EF4-FFF2-40B4-BE49-F238E27FC236}">
-                <a16:creationId xmlns:a16="http://schemas.microsoft.com/office/drawing/2014/main" id="{7BF7FDBC-0CD8-DAF3-9223-A2B2214CCF1E}"/>
+                <a16:creationId xmlns:a16="http://schemas.microsoft.com/office/drawing/2014/main" id="{FA00B62D-10CA-94FD-6D4F-89B06BA2EBA3}"/>
               </a:ext>
             </a:extLst>
           </p:cNvPr>
@@ -5833,656 +4489,6 @@
               </a:lnSpc>
             </a:pPr>
             <a:r>
-              <a:rPr lang="en-US" sz="2000" dirty="0">
-                <a:solidFill>
-                  <a:schemeClr val="tx1"/>
-                </a:solidFill>
-              </a:rPr>
-              <a:t>Si le processus est </a:t>
-            </a:r>
-            <a:r>
-              <a:rPr lang="en-US" sz="2000" dirty="0" err="1">
-                <a:solidFill>
-                  <a:schemeClr val="tx1"/>
-                </a:solidFill>
-              </a:rPr>
-              <a:t>isotrope</a:t>
-            </a:r>
-            <a:r>
-              <a:rPr lang="en-US" sz="2000" dirty="0">
-                <a:solidFill>
-                  <a:schemeClr val="tx1"/>
-                </a:solidFill>
-              </a:rPr>
-              <a:t> ,</a:t>
-            </a:r>
-            <a:r>
-              <a:rPr lang="el-GR" sz="2000" dirty="0">
-                <a:solidFill>
-                  <a:schemeClr val="tx2">
-                    <a:lumMod val="75000"/>
-                  </a:schemeClr>
-                </a:solidFill>
-              </a:rPr>
-              <a:t>Θ</a:t>
-            </a:r>
-            <a:r>
-              <a:rPr lang="fr-FR" sz="2000" dirty="0">
-                <a:solidFill>
-                  <a:schemeClr val="tx2">
-                    <a:lumMod val="75000"/>
-                  </a:schemeClr>
-                </a:solidFill>
-              </a:rPr>
-              <a:t> </a:t>
-            </a:r>
-            <a:r>
-              <a:rPr lang="en-US" sz="2000" dirty="0">
-                <a:solidFill>
-                  <a:schemeClr val="tx1"/>
-                </a:solidFill>
-              </a:rPr>
-              <a:t>depend </a:t>
-            </a:r>
-            <a:r>
-              <a:rPr lang="en-US" sz="2000" dirty="0" err="1">
-                <a:solidFill>
-                  <a:schemeClr val="tx1"/>
-                </a:solidFill>
-              </a:rPr>
-              <a:t>seulement</a:t>
-            </a:r>
-            <a:r>
-              <a:rPr lang="en-US" sz="2000" dirty="0">
-                <a:solidFill>
-                  <a:schemeClr val="tx1"/>
-                </a:solidFill>
-              </a:rPr>
-              <a:t> de la distance  h=||x1-x2||</a:t>
-            </a:r>
-          </a:p>
-        </p:txBody>
-      </p:sp>
-      <p:pic>
-        <p:nvPicPr>
-          <p:cNvPr id="4" name="Image 3">
-            <a:extLst>
-              <a:ext uri="{FF2B5EF4-FFF2-40B4-BE49-F238E27FC236}">
-                <a16:creationId xmlns:a16="http://schemas.microsoft.com/office/drawing/2014/main" id="{C8942208-A6BE-1CAB-30A0-4C91F4F55D28}"/>
-              </a:ext>
-            </a:extLst>
-          </p:cNvPr>
-          <p:cNvPicPr>
-            <a:picLocks noChangeAspect="1"/>
-          </p:cNvPicPr>
-          <p:nvPr/>
-        </p:nvPicPr>
-        <p:blipFill>
-          <a:blip r:embed="rId2">
-            <a:extLst>
-              <a:ext uri="{28A0092B-C50C-407E-A947-70E740481C1C}">
-                <a14:useLocalDpi xmlns:a14="http://schemas.microsoft.com/office/drawing/2010/main" val="0"/>
-              </a:ext>
-            </a:extLst>
-          </a:blip>
-          <a:stretch>
-            <a:fillRect/>
-          </a:stretch>
-        </p:blipFill>
-        <p:spPr>
-          <a:xfrm>
-            <a:off x="2948027" y="2564326"/>
-            <a:ext cx="4054191" cy="707922"/>
-          </a:xfrm>
-          <a:prstGeom prst="rect">
-            <a:avLst/>
-          </a:prstGeom>
-        </p:spPr>
-      </p:pic>
-      <p:sp>
-        <p:nvSpPr>
-          <p:cNvPr id="6" name="TextBox 4">
-            <a:extLst>
-              <a:ext uri="{FF2B5EF4-FFF2-40B4-BE49-F238E27FC236}">
-                <a16:creationId xmlns:a16="http://schemas.microsoft.com/office/drawing/2014/main" id="{70A60DCE-4656-B8FB-D038-FAD60571034B}"/>
-              </a:ext>
-            </a:extLst>
-          </p:cNvPr>
-          <p:cNvSpPr txBox="1"/>
-          <p:nvPr/>
-        </p:nvSpPr>
-        <p:spPr>
-          <a:xfrm>
-            <a:off x="51464" y="3127262"/>
-            <a:ext cx="2926080" cy="830997"/>
-          </a:xfrm>
-          <a:prstGeom prst="rect">
-            <a:avLst/>
-          </a:prstGeom>
-          <a:noFill/>
-        </p:spPr>
-        <p:txBody>
-          <a:bodyPr wrap="square" anchor="ctr">
-            <a:spAutoFit/>
-          </a:bodyPr>
-          <a:lstStyle/>
-          <a:p>
-            <a:pPr algn="ctr">
-              <a:defRPr sz="2400" b="1">
-                <a:solidFill>
-                  <a:srgbClr val="EA580C"/>
-                </a:solidFill>
-              </a:defRPr>
-            </a:pPr>
-            <a:r>
-              <a:rPr dirty="0">
-                <a:solidFill>
-                  <a:schemeClr val="tx2">
-                    <a:lumMod val="75000"/>
-                  </a:schemeClr>
-                </a:solidFill>
-              </a:rPr>
-              <a:t>Θ = 1</a:t>
-            </a:r>
-            <a:endParaRPr lang="fr-FR" dirty="0">
-              <a:solidFill>
-                <a:schemeClr val="tx2">
-                  <a:lumMod val="75000"/>
-                </a:schemeClr>
-              </a:solidFill>
-            </a:endParaRPr>
-          </a:p>
-          <a:p>
-            <a:pPr algn="ctr">
-              <a:defRPr sz="2400" b="1">
-                <a:solidFill>
-                  <a:srgbClr val="EA580C"/>
-                </a:solidFill>
-              </a:defRPr>
-            </a:pPr>
-            <a:endParaRPr dirty="0">
-              <a:solidFill>
-                <a:schemeClr val="tx2">
-                  <a:lumMod val="75000"/>
-                </a:schemeClr>
-              </a:solidFill>
-            </a:endParaRPr>
-          </a:p>
-        </p:txBody>
-      </p:sp>
-      <p:sp>
-        <p:nvSpPr>
-          <p:cNvPr id="10" name="TextBox 5">
-            <a:extLst>
-              <a:ext uri="{FF2B5EF4-FFF2-40B4-BE49-F238E27FC236}">
-                <a16:creationId xmlns:a16="http://schemas.microsoft.com/office/drawing/2014/main" id="{370B8396-81B7-FA11-7218-3434A2956428}"/>
-              </a:ext>
-            </a:extLst>
-          </p:cNvPr>
-          <p:cNvSpPr txBox="1"/>
-          <p:nvPr/>
-        </p:nvSpPr>
-        <p:spPr>
-          <a:xfrm>
-            <a:off x="3510568" y="3192808"/>
-            <a:ext cx="2926080" cy="461665"/>
-          </a:xfrm>
-          <a:prstGeom prst="rect">
-            <a:avLst/>
-          </a:prstGeom>
-          <a:noFill/>
-        </p:spPr>
-        <p:txBody>
-          <a:bodyPr wrap="square" anchor="ctr">
-            <a:spAutoFit/>
-          </a:bodyPr>
-          <a:lstStyle/>
-          <a:p>
-            <a:pPr algn="ctr">
-              <a:defRPr sz="2400" b="1">
-                <a:solidFill>
-                  <a:srgbClr val="2563EB"/>
-                </a:solidFill>
-              </a:defRPr>
-            </a:pPr>
-            <a:r>
-              <a:rPr dirty="0">
-                <a:solidFill>
-                  <a:schemeClr val="tx2">
-                    <a:lumMod val="75000"/>
-                  </a:schemeClr>
-                </a:solidFill>
-              </a:rPr>
-              <a:t>1 &lt; Θ &lt; 2</a:t>
-            </a:r>
-          </a:p>
-        </p:txBody>
-      </p:sp>
-      <p:sp>
-        <p:nvSpPr>
-          <p:cNvPr id="12" name="TextBox 6">
-            <a:extLst>
-              <a:ext uri="{FF2B5EF4-FFF2-40B4-BE49-F238E27FC236}">
-                <a16:creationId xmlns:a16="http://schemas.microsoft.com/office/drawing/2014/main" id="{B3AD0C5B-5F73-B594-CED0-6327404C6A0B}"/>
-              </a:ext>
-            </a:extLst>
-          </p:cNvPr>
-          <p:cNvSpPr txBox="1"/>
-          <p:nvPr/>
-        </p:nvSpPr>
-        <p:spPr>
-          <a:xfrm>
-            <a:off x="7502697" y="3192808"/>
-            <a:ext cx="2926080" cy="461665"/>
-          </a:xfrm>
-          <a:prstGeom prst="rect">
-            <a:avLst/>
-          </a:prstGeom>
-          <a:noFill/>
-        </p:spPr>
-        <p:txBody>
-          <a:bodyPr wrap="square" anchor="ctr">
-            <a:spAutoFit/>
-          </a:bodyPr>
-          <a:lstStyle/>
-          <a:p>
-            <a:pPr algn="ctr">
-              <a:defRPr sz="2400" b="1">
-                <a:solidFill>
-                  <a:srgbClr val="16A34A"/>
-                </a:solidFill>
-              </a:defRPr>
-            </a:pPr>
-            <a:r>
-              <a:rPr dirty="0">
-                <a:solidFill>
-                  <a:schemeClr val="tx2">
-                    <a:lumMod val="75000"/>
-                  </a:schemeClr>
-                </a:solidFill>
-              </a:rPr>
-              <a:t>Θ = 2</a:t>
-            </a:r>
-          </a:p>
-        </p:txBody>
-      </p:sp>
-    </p:spTree>
-    <p:extLst>
-      <p:ext uri="{BB962C8B-B14F-4D97-AF65-F5344CB8AC3E}">
-        <p14:creationId xmlns:p14="http://schemas.microsoft.com/office/powerpoint/2010/main" val="1859687788"/>
-      </p:ext>
-    </p:extLst>
-  </p:cSld>
-  <p:clrMapOvr>
-    <a:masterClrMapping/>
-  </p:clrMapOvr>
-</p:sld>
-</file>
-
-<file path=ppt/slides/slide5.xml><?xml version="1.0" encoding="utf-8"?>
-<p:sld xmlns:a="http://schemas.openxmlformats.org/drawingml/2006/main" xmlns:r="http://schemas.openxmlformats.org/officeDocument/2006/relationships" xmlns:p="http://schemas.openxmlformats.org/presentationml/2006/main">
-  <p:cSld>
-    <p:spTree>
-      <p:nvGrpSpPr>
-        <p:cNvPr id="1" name="">
-          <a:extLst>
-            <a:ext uri="{FF2B5EF4-FFF2-40B4-BE49-F238E27FC236}">
-              <a16:creationId xmlns:a16="http://schemas.microsoft.com/office/drawing/2014/main" id="{67779B07-953B-2B10-7BF4-378F78333DF9}"/>
-            </a:ext>
-          </a:extLst>
-        </p:cNvPr>
-        <p:cNvGrpSpPr/>
-        <p:nvPr/>
-      </p:nvGrpSpPr>
-      <p:grpSpPr>
-        <a:xfrm>
-          <a:off x="0" y="0"/>
-          <a:ext cx="0" cy="0"/>
-          <a:chOff x="0" y="0"/>
-          <a:chExt cx="0" cy="0"/>
-        </a:xfrm>
-      </p:grpSpPr>
-      <p:sp>
-        <p:nvSpPr>
-          <p:cNvPr id="3" name="Rectangle 2">
-            <a:extLst>
-              <a:ext uri="{FF2B5EF4-FFF2-40B4-BE49-F238E27FC236}">
-                <a16:creationId xmlns:a16="http://schemas.microsoft.com/office/drawing/2014/main" id="{AC61F060-6595-0E78-927C-C78299D53263}"/>
-              </a:ext>
-            </a:extLst>
-          </p:cNvPr>
-          <p:cNvSpPr/>
-          <p:nvPr/>
-        </p:nvSpPr>
-        <p:spPr>
-          <a:xfrm>
-            <a:off x="0" y="0"/>
-            <a:ext cx="12192000" cy="708091"/>
-          </a:xfrm>
-          <a:prstGeom prst="rect">
-            <a:avLst/>
-          </a:prstGeom>
-        </p:spPr>
-        <p:style>
-          <a:lnRef idx="2">
-            <a:schemeClr val="accent1">
-              <a:shade val="15000"/>
-            </a:schemeClr>
-          </a:lnRef>
-          <a:fillRef idx="1">
-            <a:schemeClr val="accent1"/>
-          </a:fillRef>
-          <a:effectRef idx="0">
-            <a:schemeClr val="accent1"/>
-          </a:effectRef>
-          <a:fontRef idx="minor">
-            <a:schemeClr val="lt1"/>
-          </a:fontRef>
-        </p:style>
-        <p:txBody>
-          <a:bodyPr rtlCol="0" anchor="ctr"/>
-          <a:lstStyle/>
-          <a:p>
-            <a:r>
-              <a:rPr lang="fr-FR" sz="2800" dirty="0"/>
-              <a:t>Coefficient Extrémal: mesurer la </a:t>
-            </a:r>
-            <a:r>
-              <a:rPr lang="fr-FR" sz="2800" dirty="0" err="1"/>
-              <a:t>dépensdanace</a:t>
-            </a:r>
-            <a:r>
-              <a:rPr lang="fr-FR" sz="2800" dirty="0"/>
-              <a:t> des </a:t>
-            </a:r>
-            <a:r>
-              <a:rPr lang="fr-FR" sz="2800" dirty="0" err="1"/>
-              <a:t>extremes</a:t>
-            </a:r>
-            <a:endParaRPr lang="fr-FR" sz="2800" dirty="0"/>
-          </a:p>
-        </p:txBody>
-      </p:sp>
-      <p:sp>
-        <p:nvSpPr>
-          <p:cNvPr id="7" name="Rectangle 6">
-            <a:extLst>
-              <a:ext uri="{FF2B5EF4-FFF2-40B4-BE49-F238E27FC236}">
-                <a16:creationId xmlns:a16="http://schemas.microsoft.com/office/drawing/2014/main" id="{0FBCF152-08CE-45E2-B805-A45F593323B2}"/>
-              </a:ext>
-            </a:extLst>
-          </p:cNvPr>
-          <p:cNvSpPr/>
-          <p:nvPr/>
-        </p:nvSpPr>
-        <p:spPr>
-          <a:xfrm>
-            <a:off x="620485" y="1665513"/>
-            <a:ext cx="10308771" cy="2939143"/>
-          </a:xfrm>
-          <a:prstGeom prst="rect">
-            <a:avLst/>
-          </a:prstGeom>
-          <a:solidFill>
-            <a:schemeClr val="bg1"/>
-          </a:solidFill>
-        </p:spPr>
-        <p:style>
-          <a:lnRef idx="2">
-            <a:schemeClr val="accent1">
-              <a:shade val="15000"/>
-            </a:schemeClr>
-          </a:lnRef>
-          <a:fillRef idx="1">
-            <a:schemeClr val="accent1"/>
-          </a:fillRef>
-          <a:effectRef idx="0">
-            <a:schemeClr val="accent1"/>
-          </a:effectRef>
-          <a:fontRef idx="minor">
-            <a:schemeClr val="lt1"/>
-          </a:fontRef>
-        </p:style>
-        <p:txBody>
-          <a:bodyPr rtlCol="0" anchor="ctr"/>
-          <a:lstStyle/>
-          <a:p>
-            <a:pPr marL="228600" indent="-228600">
-              <a:spcAft>
-                <a:spcPts val="1600"/>
-              </a:spcAft>
-              <a:buSzPct val="100000"/>
-              <a:buChar char="•"/>
-            </a:pPr>
-            <a:endParaRPr lang="en-US" sz="2000" b="1" dirty="0">
-              <a:solidFill>
-                <a:srgbClr val="1B2430"/>
-              </a:solidFill>
-              <a:latin typeface="Calibri" pitchFamily="34" charset="0"/>
-              <a:ea typeface="Calibri" pitchFamily="34" charset="-122"/>
-              <a:cs typeface="Calibri" pitchFamily="34" charset="-120"/>
-            </a:endParaRPr>
-          </a:p>
-          <a:p>
-            <a:pPr>
-              <a:spcAft>
-                <a:spcPts val="1600"/>
-              </a:spcAft>
-              <a:buSzPct val="100000"/>
-            </a:pPr>
-            <a:endParaRPr lang="en-US" sz="2000" dirty="0">
-              <a:solidFill>
-                <a:srgbClr val="1B2430"/>
-              </a:solidFill>
-              <a:latin typeface="Calibri" pitchFamily="34" charset="0"/>
-              <a:ea typeface="Calibri" pitchFamily="34" charset="-122"/>
-              <a:cs typeface="Calibri" pitchFamily="34" charset="-120"/>
-            </a:endParaRPr>
-          </a:p>
-          <a:p>
-            <a:pPr marL="228600" indent="-228600">
-              <a:spcAft>
-                <a:spcPts val="1600"/>
-              </a:spcAft>
-              <a:buSzPct val="100000"/>
-              <a:buChar char="•"/>
-            </a:pPr>
-            <a:endParaRPr lang="en-US" sz="2000" dirty="0"/>
-          </a:p>
-          <a:p>
-            <a:pPr marL="228600" indent="-228600">
-              <a:spcAft>
-                <a:spcPts val="1600"/>
-              </a:spcAft>
-              <a:buSzPct val="100000"/>
-              <a:buChar char="•"/>
-            </a:pPr>
-            <a:endParaRPr lang="en-US" sz="2000" dirty="0"/>
-          </a:p>
-        </p:txBody>
-      </p:sp>
-      <p:sp>
-        <p:nvSpPr>
-          <p:cNvPr id="8" name="Rectangle : coins arrondis 7">
-            <a:extLst>
-              <a:ext uri="{FF2B5EF4-FFF2-40B4-BE49-F238E27FC236}">
-                <a16:creationId xmlns:a16="http://schemas.microsoft.com/office/drawing/2014/main" id="{3438E18B-DCBB-13F0-AFDC-09CF7A0771A6}"/>
-              </a:ext>
-            </a:extLst>
-          </p:cNvPr>
-          <p:cNvSpPr/>
-          <p:nvPr/>
-        </p:nvSpPr>
-        <p:spPr>
-          <a:xfrm>
-            <a:off x="620483" y="1181358"/>
-            <a:ext cx="10308771" cy="380480"/>
-          </a:xfrm>
-          <a:prstGeom prst="roundRect">
-            <a:avLst/>
-          </a:prstGeom>
-        </p:spPr>
-        <p:style>
-          <a:lnRef idx="2">
-            <a:schemeClr val="accent1">
-              <a:shade val="15000"/>
-            </a:schemeClr>
-          </a:lnRef>
-          <a:fillRef idx="1">
-            <a:schemeClr val="accent1"/>
-          </a:fillRef>
-          <a:effectRef idx="0">
-            <a:schemeClr val="accent1"/>
-          </a:effectRef>
-          <a:fontRef idx="minor">
-            <a:schemeClr val="lt1"/>
-          </a:fontRef>
-        </p:style>
-        <p:txBody>
-          <a:bodyPr rtlCol="0" anchor="ctr"/>
-          <a:lstStyle/>
-          <a:p>
-            <a:r>
-              <a:rPr lang="fr-FR" sz="2400" dirty="0">
-                <a:solidFill>
-                  <a:schemeClr val="bg1"/>
-                </a:solidFill>
-              </a:rPr>
-              <a:t>Pourquoi </a:t>
-            </a:r>
-            <a:r>
-              <a:rPr lang="el-GR" sz="2400" dirty="0">
-                <a:solidFill>
-                  <a:schemeClr val="bg1"/>
-                </a:solidFill>
-              </a:rPr>
-              <a:t>Θ</a:t>
-            </a:r>
-            <a:r>
-              <a:rPr lang="fr-FR" sz="2400" dirty="0">
-                <a:solidFill>
-                  <a:schemeClr val="bg1"/>
-                </a:solidFill>
-              </a:rPr>
-              <a:t> est important pour la </a:t>
-            </a:r>
-            <a:r>
-              <a:rPr lang="fr-FR" sz="2400" dirty="0" err="1">
-                <a:solidFill>
-                  <a:schemeClr val="bg1"/>
-                </a:solidFill>
-              </a:rPr>
-              <a:t>diversifiaction</a:t>
-            </a:r>
-            <a:r>
-              <a:rPr lang="fr-FR" sz="2400" dirty="0">
-                <a:solidFill>
-                  <a:schemeClr val="bg1"/>
-                </a:solidFill>
-              </a:rPr>
-              <a:t> spatiale </a:t>
-            </a:r>
-          </a:p>
-        </p:txBody>
-      </p:sp>
-      <p:sp>
-        <p:nvSpPr>
-          <p:cNvPr id="15" name="Rectangle : coins arrondis 14">
-            <a:extLst>
-              <a:ext uri="{FF2B5EF4-FFF2-40B4-BE49-F238E27FC236}">
-                <a16:creationId xmlns:a16="http://schemas.microsoft.com/office/drawing/2014/main" id="{0E3EE252-4B34-CA09-4386-F49CDEF8F74E}"/>
-              </a:ext>
-            </a:extLst>
-          </p:cNvPr>
-          <p:cNvSpPr/>
-          <p:nvPr/>
-        </p:nvSpPr>
-        <p:spPr>
-          <a:xfrm>
-            <a:off x="620484" y="4812006"/>
-            <a:ext cx="10308771" cy="380480"/>
-          </a:xfrm>
-          <a:prstGeom prst="roundRect">
-            <a:avLst/>
-          </a:prstGeom>
-        </p:spPr>
-        <p:style>
-          <a:lnRef idx="2">
-            <a:schemeClr val="accent1">
-              <a:shade val="15000"/>
-            </a:schemeClr>
-          </a:lnRef>
-          <a:fillRef idx="1">
-            <a:schemeClr val="accent1"/>
-          </a:fillRef>
-          <a:effectRef idx="0">
-            <a:schemeClr val="accent1"/>
-          </a:effectRef>
-          <a:fontRef idx="minor">
-            <a:schemeClr val="lt1"/>
-          </a:fontRef>
-        </p:style>
-        <p:txBody>
-          <a:bodyPr rtlCol="0" anchor="ctr"/>
-          <a:lstStyle/>
-          <a:p>
-            <a:r>
-              <a:rPr lang="fr-FR" sz="2400" dirty="0"/>
-              <a:t>Interprétation actuarielle</a:t>
-            </a:r>
-          </a:p>
-        </p:txBody>
-      </p:sp>
-      <p:sp>
-        <p:nvSpPr>
-          <p:cNvPr id="17" name="Rectangle 16">
-            <a:extLst>
-              <a:ext uri="{FF2B5EF4-FFF2-40B4-BE49-F238E27FC236}">
-                <a16:creationId xmlns:a16="http://schemas.microsoft.com/office/drawing/2014/main" id="{FA00B62D-10CA-94FD-6D4F-89B06BA2EBA3}"/>
-              </a:ext>
-            </a:extLst>
-          </p:cNvPr>
-          <p:cNvSpPr/>
-          <p:nvPr/>
-        </p:nvSpPr>
-        <p:spPr>
-          <a:xfrm>
-            <a:off x="620484" y="5214780"/>
-            <a:ext cx="10308771" cy="1067319"/>
-          </a:xfrm>
-          <a:prstGeom prst="rect">
-            <a:avLst/>
-          </a:prstGeom>
-          <a:solidFill>
-            <a:schemeClr val="bg1"/>
-          </a:solidFill>
-        </p:spPr>
-        <p:style>
-          <a:lnRef idx="2">
-            <a:schemeClr val="accent1">
-              <a:shade val="15000"/>
-            </a:schemeClr>
-          </a:lnRef>
-          <a:fillRef idx="1">
-            <a:schemeClr val="accent1"/>
-          </a:fillRef>
-          <a:effectRef idx="0">
-            <a:schemeClr val="accent1"/>
-          </a:effectRef>
-          <a:fontRef idx="minor">
-            <a:schemeClr val="lt1"/>
-          </a:fontRef>
-        </p:style>
-        <p:txBody>
-          <a:bodyPr rtlCol="0" anchor="ctr"/>
-          <a:lstStyle/>
-          <a:p>
-            <a:pPr>
-              <a:lnSpc>
-                <a:spcPct val="125000"/>
-              </a:lnSpc>
-            </a:pPr>
-            <a:r>
               <a:rPr lang="en-US" sz="2000" dirty="0" err="1">
                 <a:solidFill>
                   <a:schemeClr val="tx1"/>
@@ -6903,7 +4909,7 @@
 </p:sld>
 </file>
 
-<file path=ppt/slides/slide6.xml><?xml version="1.0" encoding="utf-8"?>
+<file path=ppt/slides/slide3.xml><?xml version="1.0" encoding="utf-8"?>
 <p:sld xmlns:a="http://schemas.openxmlformats.org/drawingml/2006/main" xmlns:r="http://schemas.openxmlformats.org/officeDocument/2006/relationships" xmlns:p="http://schemas.openxmlformats.org/presentationml/2006/main">
   <p:cSld>
     <p:spTree>
@@ -7470,86 +5476,6 @@
     <p:extLst>
       <p:ext uri="{BB962C8B-B14F-4D97-AF65-F5344CB8AC3E}">
         <p14:creationId xmlns:p14="http://schemas.microsoft.com/office/powerpoint/2010/main" val="2627067818"/>
-      </p:ext>
-    </p:extLst>
-  </p:cSld>
-  <p:clrMapOvr>
-    <a:masterClrMapping/>
-  </p:clrMapOvr>
-</p:sld>
-</file>
-
-<file path=ppt/slides/slide7.xml><?xml version="1.0" encoding="utf-8"?>
-<p:sld xmlns:a="http://schemas.openxmlformats.org/drawingml/2006/main" xmlns:r="http://schemas.openxmlformats.org/officeDocument/2006/relationships" xmlns:p="http://schemas.openxmlformats.org/presentationml/2006/main">
-  <p:cSld>
-    <p:spTree>
-      <p:nvGrpSpPr>
-        <p:cNvPr id="1" name=""/>
-        <p:cNvGrpSpPr/>
-        <p:nvPr/>
-      </p:nvGrpSpPr>
-      <p:grpSpPr>
-        <a:xfrm>
-          <a:off x="0" y="0"/>
-          <a:ext cx="0" cy="0"/>
-          <a:chOff x="0" y="0"/>
-          <a:chExt cx="0" cy="0"/>
-        </a:xfrm>
-      </p:grpSpPr>
-      <p:sp>
-        <p:nvSpPr>
-          <p:cNvPr id="2" name="Titre 1">
-            <a:extLst>
-              <a:ext uri="{FF2B5EF4-FFF2-40B4-BE49-F238E27FC236}">
-                <a16:creationId xmlns:a16="http://schemas.microsoft.com/office/drawing/2014/main" id="{3D9A3DCA-4EB3-A4E1-5AC2-FB271AF6B60B}"/>
-              </a:ext>
-            </a:extLst>
-          </p:cNvPr>
-          <p:cNvSpPr>
-            <a:spLocks noGrp="1"/>
-          </p:cNvSpPr>
-          <p:nvPr>
-            <p:ph type="title"/>
-          </p:nvPr>
-        </p:nvSpPr>
-        <p:spPr/>
-        <p:txBody>
-          <a:bodyPr/>
-          <a:lstStyle/>
-          <a:p>
-            <a:endParaRPr lang="fr-FR"/>
-          </a:p>
-        </p:txBody>
-      </p:sp>
-      <p:sp>
-        <p:nvSpPr>
-          <p:cNvPr id="3" name="Espace réservé du contenu 2">
-            <a:extLst>
-              <a:ext uri="{FF2B5EF4-FFF2-40B4-BE49-F238E27FC236}">
-                <a16:creationId xmlns:a16="http://schemas.microsoft.com/office/drawing/2014/main" id="{F32A5538-1826-9176-0B8D-CEA1D3F76716}"/>
-              </a:ext>
-            </a:extLst>
-          </p:cNvPr>
-          <p:cNvSpPr>
-            <a:spLocks noGrp="1"/>
-          </p:cNvSpPr>
-          <p:nvPr>
-            <p:ph idx="1"/>
-          </p:nvPr>
-        </p:nvSpPr>
-        <p:spPr/>
-        <p:txBody>
-          <a:bodyPr/>
-          <a:lstStyle/>
-          <a:p>
-            <a:endParaRPr lang="fr-FR"/>
-          </a:p>
-        </p:txBody>
-      </p:sp>
-    </p:spTree>
-    <p:extLst>
-      <p:ext uri="{BB962C8B-B14F-4D97-AF65-F5344CB8AC3E}">
-        <p14:creationId xmlns:p14="http://schemas.microsoft.com/office/powerpoint/2010/main" val="3531065004"/>
       </p:ext>
     </p:extLst>
   </p:cSld>
